--- a/exports/pptx/lessons/middle-module-02-panchabhuta/day-09-project-session-2.pptx
+++ b/exports/pptx/lessons/middle-module-02-panchabhuta/day-09-project-session-2.pptx
@@ -16,9 +16,13 @@
     <p:sldId id="264" r:id="rId10"/>
     <p:sldId id="265" r:id="rId11"/>
     <p:sldId id="266" r:id="rId12"/>
+    <p:sldId id="267" r:id="rId13"/>
+    <p:sldId id="268" r:id="rId14"/>
+    <p:sldId id="269" r:id="rId15"/>
+    <p:sldId id="270" r:id="rId16"/>
   </p:sldIdLst>
   <p:notesMasterIdLst>
-    <p:notesMasterId r:id="rId13"/>
+    <p:notesMasterId r:id="rId17"/>
   </p:notesMasterIdLst>
   <p:sldSz cx="9144000" cy="5143500"/>
   <p:notesSz cx="5143500" cy="9144000"/>
@@ -712,6 +716,358 @@
             <a:fld id="{F7021451-1387-4CA6-816F-3879F97B5CBC}" type="slidenum">
               <a:rPr lang="en-US"/>
               <a:t>11</a:t>
+            </a:fld>
+            <a:endParaRPr lang="en-US"/>
+          </a:p>
+        </p:txBody>
+      </p:sp>
+    </p:spTree>
+    <p:extLst>
+      <p:ext uri="{BB962C8B-B14F-4D97-AF65-F5344CB8AC3E}">
+        <p14:creationId xmlns:p14="http://schemas.microsoft.com/office/powerpoint/2010/main" val="1024086991"/>
+      </p:ext>
+    </p:extLst>
+  </p:cSld>
+  <p:clrMapOvr>
+    <a:masterClrMapping/>
+  </p:clrMapOvr>
+</p:notes>
+</file>
+
+<file path=ppt/notesSlides/notesSlide12.xml><?xml version="1.0" encoding="utf-8"?>
+<p:notes xmlns:a="http://schemas.openxmlformats.org/drawingml/2006/main" xmlns:r="http://schemas.openxmlformats.org/officeDocument/2006/relationships" xmlns:p="http://schemas.openxmlformats.org/presentationml/2006/main">
+  <p:cSld>
+    <p:spTree>
+      <p:nvGrpSpPr>
+        <p:cNvPr id="1" name=""/>
+        <p:cNvGrpSpPr/>
+        <p:nvPr/>
+      </p:nvGrpSpPr>
+      <p:grpSpPr>
+        <a:xfrm>
+          <a:off x="0" y="0"/>
+          <a:ext cx="0" cy="0"/>
+          <a:chOff x="0" y="0"/>
+          <a:chExt cx="0" cy="0"/>
+        </a:xfrm>
+      </p:grpSpPr>
+      <p:sp>
+        <p:nvSpPr>
+          <p:cNvPr id="2" name="Slide Image Placeholder 1"/>
+          <p:cNvSpPr>
+            <a:spLocks noGrp="1" noRot="1" noChangeAspect="1"/>
+          </p:cNvSpPr>
+          <p:nvPr>
+            <p:ph type="sldImg"/>
+          </p:nvPr>
+        </p:nvSpPr>
+        <p:spPr/>
+      </p:sp>
+      <p:sp>
+        <p:nvSpPr>
+          <p:cNvPr id="3" name="Notes Placeholder 2"/>
+          <p:cNvSpPr>
+            <a:spLocks noGrp="1"/>
+          </p:cNvSpPr>
+          <p:nvPr>
+            <p:ph type="body" idx="1"/>
+          </p:nvPr>
+        </p:nvSpPr>
+        <p:spPr/>
+        <p:txBody>
+          <a:bodyPr/>
+          <a:lstStyle/>
+          <a:p>
+            <a:r>
+              <a:rPr lang="en-US" dirty="0"/>
+              <a:t/>
+            </a:r>
+            <a:endParaRPr lang="en-US" dirty="0"/>
+          </a:p>
+        </p:txBody>
+      </p:sp>
+      <p:sp>
+        <p:nvSpPr>
+          <p:cNvPr id="4" name="Slide Number Placeholder 3"/>
+          <p:cNvSpPr>
+            <a:spLocks noGrp="1"/>
+          </p:cNvSpPr>
+          <p:nvPr>
+            <p:ph type="sldNum" sz="quarter" idx="10"/>
+          </p:nvPr>
+        </p:nvSpPr>
+        <p:spPr/>
+        <p:txBody>
+          <a:bodyPr/>
+          <a:lstStyle/>
+          <a:p>
+            <a:fld id="{F7021451-1387-4CA6-816F-3879F97B5CBC}" type="slidenum">
+              <a:rPr lang="en-US"/>
+              <a:t>12</a:t>
+            </a:fld>
+            <a:endParaRPr lang="en-US"/>
+          </a:p>
+        </p:txBody>
+      </p:sp>
+    </p:spTree>
+    <p:extLst>
+      <p:ext uri="{BB962C8B-B14F-4D97-AF65-F5344CB8AC3E}">
+        <p14:creationId xmlns:p14="http://schemas.microsoft.com/office/powerpoint/2010/main" val="1024086991"/>
+      </p:ext>
+    </p:extLst>
+  </p:cSld>
+  <p:clrMapOvr>
+    <a:masterClrMapping/>
+  </p:clrMapOvr>
+</p:notes>
+</file>
+
+<file path=ppt/notesSlides/notesSlide13.xml><?xml version="1.0" encoding="utf-8"?>
+<p:notes xmlns:a="http://schemas.openxmlformats.org/drawingml/2006/main" xmlns:r="http://schemas.openxmlformats.org/officeDocument/2006/relationships" xmlns:p="http://schemas.openxmlformats.org/presentationml/2006/main">
+  <p:cSld>
+    <p:spTree>
+      <p:nvGrpSpPr>
+        <p:cNvPr id="1" name=""/>
+        <p:cNvGrpSpPr/>
+        <p:nvPr/>
+      </p:nvGrpSpPr>
+      <p:grpSpPr>
+        <a:xfrm>
+          <a:off x="0" y="0"/>
+          <a:ext cx="0" cy="0"/>
+          <a:chOff x="0" y="0"/>
+          <a:chExt cx="0" cy="0"/>
+        </a:xfrm>
+      </p:grpSpPr>
+      <p:sp>
+        <p:nvSpPr>
+          <p:cNvPr id="2" name="Slide Image Placeholder 1"/>
+          <p:cNvSpPr>
+            <a:spLocks noGrp="1" noRot="1" noChangeAspect="1"/>
+          </p:cNvSpPr>
+          <p:nvPr>
+            <p:ph type="sldImg"/>
+          </p:nvPr>
+        </p:nvSpPr>
+        <p:spPr/>
+      </p:sp>
+      <p:sp>
+        <p:nvSpPr>
+          <p:cNvPr id="3" name="Notes Placeholder 2"/>
+          <p:cNvSpPr>
+            <a:spLocks noGrp="1"/>
+          </p:cNvSpPr>
+          <p:nvPr>
+            <p:ph type="body" idx="1"/>
+          </p:nvPr>
+        </p:nvSpPr>
+        <p:spPr/>
+        <p:txBody>
+          <a:bodyPr/>
+          <a:lstStyle/>
+          <a:p>
+            <a:r>
+              <a:rPr lang="en-US" dirty="0"/>
+              <a:t/>
+            </a:r>
+            <a:endParaRPr lang="en-US" dirty="0"/>
+          </a:p>
+        </p:txBody>
+      </p:sp>
+      <p:sp>
+        <p:nvSpPr>
+          <p:cNvPr id="4" name="Slide Number Placeholder 3"/>
+          <p:cNvSpPr>
+            <a:spLocks noGrp="1"/>
+          </p:cNvSpPr>
+          <p:nvPr>
+            <p:ph type="sldNum" sz="quarter" idx="10"/>
+          </p:nvPr>
+        </p:nvSpPr>
+        <p:spPr/>
+        <p:txBody>
+          <a:bodyPr/>
+          <a:lstStyle/>
+          <a:p>
+            <a:fld id="{F7021451-1387-4CA6-816F-3879F97B5CBC}" type="slidenum">
+              <a:rPr lang="en-US"/>
+              <a:t>13</a:t>
+            </a:fld>
+            <a:endParaRPr lang="en-US"/>
+          </a:p>
+        </p:txBody>
+      </p:sp>
+    </p:spTree>
+    <p:extLst>
+      <p:ext uri="{BB962C8B-B14F-4D97-AF65-F5344CB8AC3E}">
+        <p14:creationId xmlns:p14="http://schemas.microsoft.com/office/powerpoint/2010/main" val="1024086991"/>
+      </p:ext>
+    </p:extLst>
+  </p:cSld>
+  <p:clrMapOvr>
+    <a:masterClrMapping/>
+  </p:clrMapOvr>
+</p:notes>
+</file>
+
+<file path=ppt/notesSlides/notesSlide14.xml><?xml version="1.0" encoding="utf-8"?>
+<p:notes xmlns:a="http://schemas.openxmlformats.org/drawingml/2006/main" xmlns:r="http://schemas.openxmlformats.org/officeDocument/2006/relationships" xmlns:p="http://schemas.openxmlformats.org/presentationml/2006/main">
+  <p:cSld>
+    <p:spTree>
+      <p:nvGrpSpPr>
+        <p:cNvPr id="1" name=""/>
+        <p:cNvGrpSpPr/>
+        <p:nvPr/>
+      </p:nvGrpSpPr>
+      <p:grpSpPr>
+        <a:xfrm>
+          <a:off x="0" y="0"/>
+          <a:ext cx="0" cy="0"/>
+          <a:chOff x="0" y="0"/>
+          <a:chExt cx="0" cy="0"/>
+        </a:xfrm>
+      </p:grpSpPr>
+      <p:sp>
+        <p:nvSpPr>
+          <p:cNvPr id="2" name="Slide Image Placeholder 1"/>
+          <p:cNvSpPr>
+            <a:spLocks noGrp="1" noRot="1" noChangeAspect="1"/>
+          </p:cNvSpPr>
+          <p:nvPr>
+            <p:ph type="sldImg"/>
+          </p:nvPr>
+        </p:nvSpPr>
+        <p:spPr/>
+      </p:sp>
+      <p:sp>
+        <p:nvSpPr>
+          <p:cNvPr id="3" name="Notes Placeholder 2"/>
+          <p:cNvSpPr>
+            <a:spLocks noGrp="1"/>
+          </p:cNvSpPr>
+          <p:nvPr>
+            <p:ph type="body" idx="1"/>
+          </p:nvPr>
+        </p:nvSpPr>
+        <p:spPr/>
+        <p:txBody>
+          <a:bodyPr/>
+          <a:lstStyle/>
+          <a:p>
+            <a:r>
+              <a:rPr lang="en-US" dirty="0"/>
+              <a:t/>
+            </a:r>
+            <a:endParaRPr lang="en-US" dirty="0"/>
+          </a:p>
+        </p:txBody>
+      </p:sp>
+      <p:sp>
+        <p:nvSpPr>
+          <p:cNvPr id="4" name="Slide Number Placeholder 3"/>
+          <p:cNvSpPr>
+            <a:spLocks noGrp="1"/>
+          </p:cNvSpPr>
+          <p:nvPr>
+            <p:ph type="sldNum" sz="quarter" idx="10"/>
+          </p:nvPr>
+        </p:nvSpPr>
+        <p:spPr/>
+        <p:txBody>
+          <a:bodyPr/>
+          <a:lstStyle/>
+          <a:p>
+            <a:fld id="{F7021451-1387-4CA6-816F-3879F97B5CBC}" type="slidenum">
+              <a:rPr lang="en-US"/>
+              <a:t>14</a:t>
+            </a:fld>
+            <a:endParaRPr lang="en-US"/>
+          </a:p>
+        </p:txBody>
+      </p:sp>
+    </p:spTree>
+    <p:extLst>
+      <p:ext uri="{BB962C8B-B14F-4D97-AF65-F5344CB8AC3E}">
+        <p14:creationId xmlns:p14="http://schemas.microsoft.com/office/powerpoint/2010/main" val="1024086991"/>
+      </p:ext>
+    </p:extLst>
+  </p:cSld>
+  <p:clrMapOvr>
+    <a:masterClrMapping/>
+  </p:clrMapOvr>
+</p:notes>
+</file>
+
+<file path=ppt/notesSlides/notesSlide15.xml><?xml version="1.0" encoding="utf-8"?>
+<p:notes xmlns:a="http://schemas.openxmlformats.org/drawingml/2006/main" xmlns:r="http://schemas.openxmlformats.org/officeDocument/2006/relationships" xmlns:p="http://schemas.openxmlformats.org/presentationml/2006/main">
+  <p:cSld>
+    <p:spTree>
+      <p:nvGrpSpPr>
+        <p:cNvPr id="1" name=""/>
+        <p:cNvGrpSpPr/>
+        <p:nvPr/>
+      </p:nvGrpSpPr>
+      <p:grpSpPr>
+        <a:xfrm>
+          <a:off x="0" y="0"/>
+          <a:ext cx="0" cy="0"/>
+          <a:chOff x="0" y="0"/>
+          <a:chExt cx="0" cy="0"/>
+        </a:xfrm>
+      </p:grpSpPr>
+      <p:sp>
+        <p:nvSpPr>
+          <p:cNvPr id="2" name="Slide Image Placeholder 1"/>
+          <p:cNvSpPr>
+            <a:spLocks noGrp="1" noRot="1" noChangeAspect="1"/>
+          </p:cNvSpPr>
+          <p:nvPr>
+            <p:ph type="sldImg"/>
+          </p:nvPr>
+        </p:nvSpPr>
+        <p:spPr/>
+      </p:sp>
+      <p:sp>
+        <p:nvSpPr>
+          <p:cNvPr id="3" name="Notes Placeholder 2"/>
+          <p:cNvSpPr>
+            <a:spLocks noGrp="1"/>
+          </p:cNvSpPr>
+          <p:nvPr>
+            <p:ph type="body" idx="1"/>
+          </p:nvPr>
+        </p:nvSpPr>
+        <p:spPr/>
+        <p:txBody>
+          <a:bodyPr/>
+          <a:lstStyle/>
+          <a:p>
+            <a:r>
+              <a:rPr lang="en-US" dirty="0"/>
+              <a:t/>
+            </a:r>
+            <a:endParaRPr lang="en-US" dirty="0"/>
+          </a:p>
+        </p:txBody>
+      </p:sp>
+      <p:sp>
+        <p:nvSpPr>
+          <p:cNvPr id="4" name="Slide Number Placeholder 3"/>
+          <p:cNvSpPr>
+            <a:spLocks noGrp="1"/>
+          </p:cNvSpPr>
+          <p:nvPr>
+            <p:ph type="sldNum" sz="quarter" idx="10"/>
+          </p:nvPr>
+        </p:nvSpPr>
+        <p:spPr/>
+        <p:txBody>
+          <a:bodyPr/>
+          <a:lstStyle/>
+          <a:p>
+            <a:fld id="{F7021451-1387-4CA6-816F-3879F97B5CBC}" type="slidenum">
+              <a:rPr lang="en-US"/>
+              <a:t>15</a:t>
             </a:fld>
             <a:endParaRPr lang="en-US"/>
           </a:p>
@@ -2011,102 +2367,6 @@
         </p:nvSpPr>
         <p:spPr>
           <a:xfrm>
-            <a:off x="406301" y="1223963"/>
-            <a:ext cx="8498026" cy="274290"/>
-          </a:xfrm>
-          <a:prstGeom prst="rect">
-            <a:avLst/>
-          </a:prstGeom>
-          <a:noFill/>
-          <a:ln/>
-        </p:spPr>
-        <p:txBody>
-          <a:bodyPr wrap="square" lIns="0" tIns="0" rIns="0" bIns="0" rtlCol="0" anchor="t"/>
-          <a:lstStyle/>
-          <a:p>
-            <a:pPr algn="l" indent="0" marL="0">
-              <a:lnSpc>
-                <a:spcPts val="2160"/>
-              </a:lnSpc>
-              <a:spcBef>
-                <a:spcPts val="600"/>
-              </a:spcBef>
-              <a:spcAft>
-                <a:spcPts val="800"/>
-              </a:spcAft>
-              <a:buNone/>
-            </a:pPr>
-            <a:r>
-              <a:rPr lang="en-US" sz="1800" b="1" dirty="0">
-                <a:solidFill>
-                  <a:srgbClr val="FE4447"/>
-                </a:solidFill>
-                <a:latin typeface="Georgia" pitchFamily="34" charset="0"/>
-                <a:ea typeface="Georgia" pitchFamily="34" charset="-122"/>
-                <a:cs typeface="Georgia" pitchFamily="34" charset="-120"/>
-              </a:rPr>
-              <a:t>Learning objective</a:t>
-            </a:r>
-            <a:endParaRPr lang="en-US" sz="1800" dirty="0"/>
-          </a:p>
-        </p:txBody>
-      </p:sp>
-      <p:sp>
-        <p:nvSpPr>
-          <p:cNvPr id="6" name="Text 4"/>
-          <p:cNvSpPr/>
-          <p:nvPr/>
-        </p:nvSpPr>
-        <p:spPr>
-          <a:xfrm>
-            <a:off x="406301" y="1637854"/>
-            <a:ext cx="8498026" cy="426541"/>
-          </a:xfrm>
-          <a:prstGeom prst="rect">
-            <a:avLst/>
-          </a:prstGeom>
-          <a:noFill/>
-          <a:ln/>
-        </p:spPr>
-        <p:txBody>
-          <a:bodyPr wrap="square" lIns="0" tIns="0" rIns="0" bIns="0" rtlCol="0" anchor="t"/>
-          <a:lstStyle/>
-          <a:p>
-            <a:pPr algn="l" indent="0" marL="0">
-              <a:lnSpc>
-                <a:spcPts val="1680"/>
-              </a:lnSpc>
-              <a:spcBef>
-                <a:spcPts val="300"/>
-              </a:spcBef>
-              <a:spcAft>
-                <a:spcPts val="300"/>
-              </a:spcAft>
-              <a:buNone/>
-            </a:pPr>
-            <a:r>
-              <a:rPr lang="en-US" sz="1200" dirty="0">
-                <a:solidFill>
-                  <a:srgbClr val="1C2833"/>
-                </a:solidFill>
-                <a:latin typeface="Arial" pitchFamily="34" charset="0"/>
-                <a:ea typeface="Arial" pitchFamily="34" charset="-122"/>
-                <a:cs typeface="Arial" pitchFamily="34" charset="-120"/>
-              </a:rPr>
-              <a:t>By the end of this lesson, every pair will have a presentation-ready project artefact and will have rehearsed their 3-minute presentation at least once with timed feedback.</a:t>
-            </a:r>
-            <a:endParaRPr lang="en-US" sz="1200" dirty="0"/>
-          </a:p>
-        </p:txBody>
-      </p:sp>
-      <p:sp>
-        <p:nvSpPr>
-          <p:cNvPr id="7" name="Text 5"/>
-          <p:cNvSpPr/>
-          <p:nvPr/>
-        </p:nvSpPr>
-        <p:spPr>
-          <a:xfrm>
             <a:off x="406301" y="4434929"/>
             <a:ext cx="8498026" cy="213271"/>
           </a:xfrm>
@@ -2251,7 +2511,7 @@
                 <a:ea typeface="Georgia" pitchFamily="34" charset="-122"/>
                 <a:cs typeface="Georgia" pitchFamily="34" charset="-120"/>
               </a:rPr>
-              <a:t>Teacher notes</a:t>
+              <a:t>Wrap-up (5 min)</a:t>
             </a:r>
             <a:endParaRPr lang="en-US" sz="1800" dirty="0"/>
           </a:p>
@@ -2265,8 +2525,8 @@
         </p:nvSpPr>
         <p:spPr>
           <a:xfrm>
-            <a:off x="406301" y="870942"/>
-            <a:ext cx="8498026" cy="639812"/>
+            <a:off x="634901" y="883593"/>
+            <a:ext cx="8102798" cy="525661"/>
           </a:xfrm>
           <a:prstGeom prst="rect">
             <a:avLst/>
@@ -2278,17 +2538,15 @@
           <a:bodyPr wrap="square" lIns="0" tIns="0" rIns="0" bIns="0" rtlCol="0" anchor="t"/>
           <a:lstStyle/>
           <a:p>
-            <a:pPr algn="l" indent="0" marL="0">
-              <a:lnSpc>
-                <a:spcPts val="1680"/>
-              </a:lnSpc>
-              <a:spcBef>
-                <a:spcPts val="300"/>
-              </a:spcBef>
-              <a:spcAft>
-                <a:spcPts val="300"/>
-              </a:spcAft>
-              <a:buNone/>
+            <a:pPr algn="l" marL="342900" indent="-342900">
+              <a:lnSpc>
+                <a:spcPts val="1620"/>
+              </a:lnSpc>
+              <a:spcAft>
+                <a:spcPts val="300"/>
+              </a:spcAft>
+              <a:buSzPct val="100000"/>
+              <a:buChar char="•"/>
             </a:pPr>
             <a:r>
               <a:rPr lang="en-US" sz="1200" dirty="0">
@@ -2299,15 +2557,12 @@
                 <a:ea typeface="Arial" pitchFamily="34" charset="-122"/>
                 <a:cs typeface="Arial" pitchFamily="34" charset="-120"/>
               </a:rPr>
-              <a:t>– The "buddy pair" rehearsal often surfaces problems the teacher missed. Encourage students to be </a:t>
+              <a:t>One-sentence share: </a:t>
             </a:r>
             <a:pPr algn="l" indent="0" marL="0">
               <a:lnSpc>
-                <a:spcPts val="1680"/>
-              </a:lnSpc>
-              <a:spcBef>
-                <a:spcPts val="300"/>
-              </a:spcBef>
+                <a:spcPts val="1620"/>
+              </a:lnSpc>
               <a:spcAft>
                 <a:spcPts val="300"/>
               </a:spcAft>
@@ -2322,15 +2577,12 @@
                 <a:ea typeface="Arial" pitchFamily="34" charset="-122"/>
                 <a:cs typeface="Arial" pitchFamily="34" charset="-120"/>
               </a:rPr>
-              <a:t>kind and specific</a:t>
+              <a:t>"What's the one thing I'm changing before tomorrow?"</a:t>
             </a:r>
             <a:pPr algn="l" indent="0" marL="0">
               <a:lnSpc>
-                <a:spcPts val="1680"/>
-              </a:lnSpc>
-              <a:spcBef>
-                <a:spcPts val="300"/>
-              </a:spcBef>
+                <a:spcPts val="1620"/>
+              </a:lnSpc>
               <a:spcAft>
                 <a:spcPts val="300"/>
               </a:spcAft>
@@ -2345,7 +2597,31 @@
                 <a:ea typeface="Arial" pitchFamily="34" charset="-122"/>
                 <a:cs typeface="Arial" pitchFamily="34" charset="-120"/>
               </a:rPr>
-              <a:t> in their feedback — "the part about water was clear, the part about pollution was rushed" beats "good job." – Pairs who consistently can't fit in 3 minutes are usually trying to say too much. Help them cut.</a:t>
+              <a:t> — every pair contributes.</a:t>
+            </a:r>
+            <a:endParaRPr lang="en-US" sz="1200" dirty="0"/>
+          </a:p>
+          <a:p>
+            <a:pPr algn="l" marL="342900" indent="-342900">
+              <a:lnSpc>
+                <a:spcPts val="1620"/>
+              </a:lnSpc>
+              <a:spcAft>
+                <a:spcPts val="300"/>
+              </a:spcAft>
+              <a:buSzPct val="100000"/>
+              <a:buChar char="•"/>
+            </a:pPr>
+            <a:r>
+              <a:rPr lang="en-US" sz="1200" dirty="0">
+                <a:solidFill>
+                  <a:srgbClr val="1C2833"/>
+                </a:solidFill>
+                <a:latin typeface="Arial" pitchFamily="34" charset="0"/>
+                <a:ea typeface="Arial" pitchFamily="34" charset="-122"/>
+                <a:cs typeface="Arial" pitchFamily="34" charset="-120"/>
+              </a:rPr>
+              <a:t>Tomorrow: full presentations + summative quiz.</a:t>
             </a:r>
             <a:endParaRPr lang="en-US" sz="1200" dirty="0"/>
           </a:p>
@@ -2503,7 +2779,7 @@
                 <a:ea typeface="Georgia" pitchFamily="34" charset="-122"/>
                 <a:cs typeface="Georgia" pitchFamily="34" charset="-120"/>
               </a:rPr>
-              <a:t>Citation(s) used in this lesson</a:t>
+              <a:t>Student-facing content</a:t>
             </a:r>
             <a:endParaRPr lang="en-US" sz="1800" dirty="0"/>
           </a:p>
@@ -2517,7 +2793,540 @@
         </p:nvSpPr>
         <p:spPr>
           <a:xfrm>
-            <a:off x="406301" y="870942"/>
+            <a:off x="406301" y="883593"/>
+            <a:ext cx="8331398" cy="3033713"/>
+          </a:xfrm>
+          <a:prstGeom prst="rect">
+            <a:avLst/>
+          </a:prstGeom>
+          <a:solidFill>
+            <a:srgbClr val="F4F8F9"/>
+          </a:solidFill>
+          <a:ln/>
+        </p:spPr>
+        <p:txBody>
+          <a:bodyPr wrap="square" rtlCol="0" anchor="ctr"/>
+          <a:lstStyle/>
+          <a:p>
+            <a:pPr indent="0" marL="0">
+              <a:buNone/>
+            </a:pPr>
+            <a:endParaRPr lang="en-US" dirty="0"/>
+          </a:p>
+        </p:txBody>
+      </p:sp>
+      <p:sp>
+        <p:nvSpPr>
+          <p:cNvPr id="5" name="Shape 3"/>
+          <p:cNvSpPr/>
+          <p:nvPr/>
+        </p:nvSpPr>
+        <p:spPr>
+          <a:xfrm>
+            <a:off x="434876" y="883593"/>
+            <a:ext cx="0" cy="3033713"/>
+          </a:xfrm>
+          <a:prstGeom prst="line">
+            <a:avLst/>
+          </a:prstGeom>
+          <a:noFill/>
+          <a:ln w="57150">
+            <a:solidFill>
+              <a:srgbClr val="FE4447"/>
+            </a:solidFill>
+            <a:prstDash val="solid"/>
+          </a:ln>
+        </p:spPr>
+      </p:sp>
+      <p:sp>
+        <p:nvSpPr>
+          <p:cNvPr id="6" name="Text 4"/>
+          <p:cNvSpPr/>
+          <p:nvPr/>
+        </p:nvSpPr>
+        <p:spPr>
+          <a:xfrm>
+            <a:off x="692051" y="1074093"/>
+            <a:ext cx="7973389" cy="230981"/>
+          </a:xfrm>
+          <a:prstGeom prst="rect">
+            <a:avLst/>
+          </a:prstGeom>
+          <a:noFill/>
+          <a:ln/>
+        </p:spPr>
+        <p:txBody>
+          <a:bodyPr wrap="square" lIns="0" tIns="0" rIns="0" bIns="0" rtlCol="0" anchor="t"/>
+          <a:lstStyle/>
+          <a:p>
+            <a:pPr algn="l" indent="0" marL="0">
+              <a:lnSpc>
+                <a:spcPts val="1820"/>
+              </a:lnSpc>
+              <a:spcBef>
+                <a:spcPts val="300"/>
+              </a:spcBef>
+              <a:spcAft>
+                <a:spcPts val="300"/>
+              </a:spcAft>
+              <a:buNone/>
+            </a:pPr>
+            <a:r>
+              <a:rPr lang="en-US" sz="1300" b="1" i="1" dirty="0">
+                <a:solidFill>
+                  <a:srgbClr val="1C2833"/>
+                </a:solidFill>
+                <a:latin typeface="Georgia" pitchFamily="34" charset="0"/>
+                <a:ea typeface="Georgia" pitchFamily="34" charset="-122"/>
+                <a:cs typeface="Georgia" pitchFamily="34" charset="-120"/>
+              </a:rPr>
+              <a:t>Project workshop — Session 2: Refine + Rehearse</a:t>
+            </a:r>
+            <a:endParaRPr lang="en-US" sz="1300" dirty="0"/>
+          </a:p>
+        </p:txBody>
+      </p:sp>
+      <p:sp>
+        <p:nvSpPr>
+          <p:cNvPr id="7" name="Text 5"/>
+          <p:cNvSpPr/>
+          <p:nvPr/>
+        </p:nvSpPr>
+        <p:spPr>
+          <a:xfrm>
+            <a:off x="692051" y="1343174"/>
+            <a:ext cx="7973389" cy="230981"/>
+          </a:xfrm>
+          <a:prstGeom prst="rect">
+            <a:avLst/>
+          </a:prstGeom>
+          <a:noFill/>
+          <a:ln/>
+        </p:spPr>
+        <p:txBody>
+          <a:bodyPr wrap="square" lIns="0" tIns="0" rIns="0" bIns="0" rtlCol="0" anchor="t"/>
+          <a:lstStyle/>
+          <a:p>
+            <a:pPr algn="l" indent="0" marL="0">
+              <a:lnSpc>
+                <a:spcPts val="1820"/>
+              </a:lnSpc>
+              <a:spcBef>
+                <a:spcPts val="300"/>
+              </a:spcBef>
+              <a:spcAft>
+                <a:spcPts val="300"/>
+              </a:spcAft>
+              <a:buNone/>
+            </a:pPr>
+            <a:r>
+              <a:rPr lang="en-US" sz="1300" i="1" dirty="0">
+                <a:solidFill>
+                  <a:srgbClr val="1C2833"/>
+                </a:solidFill>
+                <a:latin typeface="Georgia" pitchFamily="34" charset="0"/>
+                <a:ea typeface="Georgia" pitchFamily="34" charset="-122"/>
+                <a:cs typeface="Georgia" pitchFamily="34" charset="-120"/>
+              </a:rPr>
+              <a:t>Today's checklist:</a:t>
+            </a:r>
+            <a:endParaRPr lang="en-US" sz="1300" dirty="0"/>
+          </a:p>
+        </p:txBody>
+      </p:sp>
+      <p:sp>
+        <p:nvSpPr>
+          <p:cNvPr id="8" name="Text 6"/>
+          <p:cNvSpPr/>
+          <p:nvPr/>
+        </p:nvSpPr>
+        <p:spPr>
+          <a:xfrm>
+            <a:off x="692051" y="1612255"/>
+            <a:ext cx="7973389" cy="230981"/>
+          </a:xfrm>
+          <a:prstGeom prst="rect">
+            <a:avLst/>
+          </a:prstGeom>
+          <a:noFill/>
+          <a:ln/>
+        </p:spPr>
+        <p:txBody>
+          <a:bodyPr wrap="square" lIns="0" tIns="0" rIns="0" bIns="0" rtlCol="0" anchor="t"/>
+          <a:lstStyle/>
+          <a:p>
+            <a:pPr algn="l" indent="0" marL="0">
+              <a:lnSpc>
+                <a:spcPts val="1820"/>
+              </a:lnSpc>
+              <a:spcBef>
+                <a:spcPts val="300"/>
+              </a:spcBef>
+              <a:spcAft>
+                <a:spcPts val="300"/>
+              </a:spcAft>
+              <a:buNone/>
+            </a:pPr>
+            <a:r>
+              <a:rPr lang="en-US" sz="1300" i="1" dirty="0">
+                <a:solidFill>
+                  <a:srgbClr val="1C2833"/>
+                </a:solidFill>
+                <a:latin typeface="Georgia" pitchFamily="34" charset="0"/>
+                <a:ea typeface="Georgia" pitchFamily="34" charset="-122"/>
+                <a:cs typeface="Georgia" pitchFamily="34" charset="-120"/>
+              </a:rPr>
+              <a:t>[ ] My artefact is presentation-ready (no half-finished sections).</a:t>
+            </a:r>
+            <a:endParaRPr lang="en-US" sz="1300" dirty="0"/>
+          </a:p>
+        </p:txBody>
+      </p:sp>
+      <p:sp>
+        <p:nvSpPr>
+          <p:cNvPr id="9" name="Text 7"/>
+          <p:cNvSpPr/>
+          <p:nvPr/>
+        </p:nvSpPr>
+        <p:spPr>
+          <a:xfrm>
+            <a:off x="692051" y="1881336"/>
+            <a:ext cx="7973389" cy="230981"/>
+          </a:xfrm>
+          <a:prstGeom prst="rect">
+            <a:avLst/>
+          </a:prstGeom>
+          <a:noFill/>
+          <a:ln/>
+        </p:spPr>
+        <p:txBody>
+          <a:bodyPr wrap="square" lIns="0" tIns="0" rIns="0" bIns="0" rtlCol="0" anchor="t"/>
+          <a:lstStyle/>
+          <a:p>
+            <a:pPr algn="l" indent="0" marL="0">
+              <a:lnSpc>
+                <a:spcPts val="1820"/>
+              </a:lnSpc>
+              <a:spcBef>
+                <a:spcPts val="300"/>
+              </a:spcBef>
+              <a:spcAft>
+                <a:spcPts val="300"/>
+              </a:spcAft>
+              <a:buNone/>
+            </a:pPr>
+            <a:r>
+              <a:rPr lang="en-US" sz="1300" i="1" dirty="0">
+                <a:solidFill>
+                  <a:srgbClr val="1C2833"/>
+                </a:solidFill>
+                <a:latin typeface="Georgia" pitchFamily="34" charset="0"/>
+                <a:ea typeface="Georgia" pitchFamily="34" charset="-122"/>
+                <a:cs typeface="Georgia" pitchFamily="34" charset="-120"/>
+              </a:rPr>
+              <a:t>[ ] I've cited at least one source (verse, sūtra, or PDF).</a:t>
+            </a:r>
+            <a:endParaRPr lang="en-US" sz="1300" dirty="0"/>
+          </a:p>
+        </p:txBody>
+      </p:sp>
+      <p:sp>
+        <p:nvSpPr>
+          <p:cNvPr id="10" name="Text 8"/>
+          <p:cNvSpPr/>
+          <p:nvPr/>
+        </p:nvSpPr>
+        <p:spPr>
+          <a:xfrm>
+            <a:off x="692051" y="2150418"/>
+            <a:ext cx="7973389" cy="230981"/>
+          </a:xfrm>
+          <a:prstGeom prst="rect">
+            <a:avLst/>
+          </a:prstGeom>
+          <a:noFill/>
+          <a:ln/>
+        </p:spPr>
+        <p:txBody>
+          <a:bodyPr wrap="square" lIns="0" tIns="0" rIns="0" bIns="0" rtlCol="0" anchor="t"/>
+          <a:lstStyle/>
+          <a:p>
+            <a:pPr algn="l" indent="0" marL="0">
+              <a:lnSpc>
+                <a:spcPts val="1820"/>
+              </a:lnSpc>
+              <a:spcBef>
+                <a:spcPts val="300"/>
+              </a:spcBef>
+              <a:spcAft>
+                <a:spcPts val="300"/>
+              </a:spcAft>
+              <a:buNone/>
+            </a:pPr>
+            <a:r>
+              <a:rPr lang="en-US" sz="1300" i="1" dirty="0">
+                <a:solidFill>
+                  <a:srgbClr val="1C2833"/>
+                </a:solidFill>
+                <a:latin typeface="Georgia" pitchFamily="34" charset="0"/>
+                <a:ea typeface="Georgia" pitchFamily="34" charset="-122"/>
+                <a:cs typeface="Georgia" pitchFamily="34" charset="-120"/>
+              </a:rPr>
+              <a:t>[ ] I've named at least one modern-science parallel.</a:t>
+            </a:r>
+            <a:endParaRPr lang="en-US" sz="1300" dirty="0"/>
+          </a:p>
+        </p:txBody>
+      </p:sp>
+      <p:sp>
+        <p:nvSpPr>
+          <p:cNvPr id="11" name="Text 9"/>
+          <p:cNvSpPr/>
+          <p:nvPr/>
+        </p:nvSpPr>
+        <p:spPr>
+          <a:xfrm>
+            <a:off x="692051" y="2419499"/>
+            <a:ext cx="7973389" cy="230981"/>
+          </a:xfrm>
+          <a:prstGeom prst="rect">
+            <a:avLst/>
+          </a:prstGeom>
+          <a:noFill/>
+          <a:ln/>
+        </p:spPr>
+        <p:txBody>
+          <a:bodyPr wrap="square" lIns="0" tIns="0" rIns="0" bIns="0" rtlCol="0" anchor="t"/>
+          <a:lstStyle/>
+          <a:p>
+            <a:pPr algn="l" indent="0" marL="0">
+              <a:lnSpc>
+                <a:spcPts val="1820"/>
+              </a:lnSpc>
+              <a:spcBef>
+                <a:spcPts val="300"/>
+              </a:spcBef>
+              <a:spcAft>
+                <a:spcPts val="300"/>
+              </a:spcAft>
+              <a:buNone/>
+            </a:pPr>
+            <a:r>
+              <a:rPr lang="en-US" sz="1300" i="1" dirty="0">
+                <a:solidFill>
+                  <a:srgbClr val="1C2833"/>
+                </a:solidFill>
+                <a:latin typeface="Georgia" pitchFamily="34" charset="0"/>
+                <a:ea typeface="Georgia" pitchFamily="34" charset="-122"/>
+                <a:cs typeface="Georgia" pitchFamily="34" charset="-120"/>
+              </a:rPr>
+              <a:t>[ ] I've named one local example of imbalance.</a:t>
+            </a:r>
+            <a:endParaRPr lang="en-US" sz="1300" dirty="0"/>
+          </a:p>
+        </p:txBody>
+      </p:sp>
+      <p:sp>
+        <p:nvSpPr>
+          <p:cNvPr id="12" name="Text 10"/>
+          <p:cNvSpPr/>
+          <p:nvPr/>
+        </p:nvSpPr>
+        <p:spPr>
+          <a:xfrm>
+            <a:off x="692051" y="2688580"/>
+            <a:ext cx="7973389" cy="230981"/>
+          </a:xfrm>
+          <a:prstGeom prst="rect">
+            <a:avLst/>
+          </a:prstGeom>
+          <a:noFill/>
+          <a:ln/>
+        </p:spPr>
+        <p:txBody>
+          <a:bodyPr wrap="square" lIns="0" tIns="0" rIns="0" bIns="0" rtlCol="0" anchor="t"/>
+          <a:lstStyle/>
+          <a:p>
+            <a:pPr algn="l" indent="0" marL="0">
+              <a:lnSpc>
+                <a:spcPts val="1820"/>
+              </a:lnSpc>
+              <a:spcBef>
+                <a:spcPts val="300"/>
+              </a:spcBef>
+              <a:spcAft>
+                <a:spcPts val="300"/>
+              </a:spcAft>
+              <a:buNone/>
+            </a:pPr>
+            <a:r>
+              <a:rPr lang="en-US" sz="1300" i="1" dirty="0">
+                <a:solidFill>
+                  <a:srgbClr val="1C2833"/>
+                </a:solidFill>
+                <a:latin typeface="Georgia" pitchFamily="34" charset="0"/>
+                <a:ea typeface="Georgia" pitchFamily="34" charset="-122"/>
+                <a:cs typeface="Georgia" pitchFamily="34" charset="-120"/>
+              </a:rPr>
+              <a:t>[ ] I've timed my presentation — it fits in 3 minutes.</a:t>
+            </a:r>
+            <a:endParaRPr lang="en-US" sz="1300" dirty="0"/>
+          </a:p>
+        </p:txBody>
+      </p:sp>
+      <p:sp>
+        <p:nvSpPr>
+          <p:cNvPr id="13" name="Text 11"/>
+          <p:cNvSpPr/>
+          <p:nvPr/>
+        </p:nvSpPr>
+        <p:spPr>
+          <a:xfrm>
+            <a:off x="692051" y="2957661"/>
+            <a:ext cx="7973389" cy="230981"/>
+          </a:xfrm>
+          <a:prstGeom prst="rect">
+            <a:avLst/>
+          </a:prstGeom>
+          <a:noFill/>
+          <a:ln/>
+        </p:spPr>
+        <p:txBody>
+          <a:bodyPr wrap="square" lIns="0" tIns="0" rIns="0" bIns="0" rtlCol="0" anchor="t"/>
+          <a:lstStyle/>
+          <a:p>
+            <a:pPr algn="l" indent="0" marL="0">
+              <a:lnSpc>
+                <a:spcPts val="1820"/>
+              </a:lnSpc>
+              <a:spcBef>
+                <a:spcPts val="300"/>
+              </a:spcBef>
+              <a:spcAft>
+                <a:spcPts val="300"/>
+              </a:spcAft>
+              <a:buNone/>
+            </a:pPr>
+            <a:r>
+              <a:rPr lang="en-US" sz="1300" i="1" dirty="0">
+                <a:solidFill>
+                  <a:srgbClr val="1C2833"/>
+                </a:solidFill>
+                <a:latin typeface="Georgia" pitchFamily="34" charset="0"/>
+                <a:ea typeface="Georgia" pitchFamily="34" charset="-122"/>
+                <a:cs typeface="Georgia" pitchFamily="34" charset="-120"/>
+              </a:rPr>
+              <a:t>[ ] I know what my partner says and what I say.</a:t>
+            </a:r>
+            <a:endParaRPr lang="en-US" sz="1300" dirty="0"/>
+          </a:p>
+        </p:txBody>
+      </p:sp>
+      <p:sp>
+        <p:nvSpPr>
+          <p:cNvPr id="14" name="Text 12"/>
+          <p:cNvSpPr/>
+          <p:nvPr/>
+        </p:nvSpPr>
+        <p:spPr>
+          <a:xfrm>
+            <a:off x="692051" y="3226743"/>
+            <a:ext cx="7973389" cy="230981"/>
+          </a:xfrm>
+          <a:prstGeom prst="rect">
+            <a:avLst/>
+          </a:prstGeom>
+          <a:noFill/>
+          <a:ln/>
+        </p:spPr>
+        <p:txBody>
+          <a:bodyPr wrap="square" lIns="0" tIns="0" rIns="0" bIns="0" rtlCol="0" anchor="t"/>
+          <a:lstStyle/>
+          <a:p>
+            <a:pPr algn="l" indent="0" marL="0">
+              <a:lnSpc>
+                <a:spcPts val="1820"/>
+              </a:lnSpc>
+              <a:spcBef>
+                <a:spcPts val="300"/>
+              </a:spcBef>
+              <a:spcAft>
+                <a:spcPts val="300"/>
+              </a:spcAft>
+              <a:buNone/>
+            </a:pPr>
+            <a:r>
+              <a:rPr lang="en-US" sz="1300" i="1" dirty="0">
+                <a:solidFill>
+                  <a:srgbClr val="1C2833"/>
+                </a:solidFill>
+                <a:latin typeface="Georgia" pitchFamily="34" charset="0"/>
+                <a:ea typeface="Georgia" pitchFamily="34" charset="-122"/>
+                <a:cs typeface="Georgia" pitchFamily="34" charset="-120"/>
+              </a:rPr>
+              <a:t>[ ] I've heard feedback from one other pair and decided what to change.</a:t>
+            </a:r>
+            <a:endParaRPr lang="en-US" sz="1300" dirty="0"/>
+          </a:p>
+        </p:txBody>
+      </p:sp>
+      <p:sp>
+        <p:nvSpPr>
+          <p:cNvPr id="15" name="Text 13"/>
+          <p:cNvSpPr/>
+          <p:nvPr/>
+        </p:nvSpPr>
+        <p:spPr>
+          <a:xfrm>
+            <a:off x="692051" y="3495824"/>
+            <a:ext cx="7973389" cy="230981"/>
+          </a:xfrm>
+          <a:prstGeom prst="rect">
+            <a:avLst/>
+          </a:prstGeom>
+          <a:noFill/>
+          <a:ln/>
+        </p:spPr>
+        <p:txBody>
+          <a:bodyPr wrap="square" lIns="0" tIns="0" rIns="0" bIns="0" rtlCol="0" anchor="t"/>
+          <a:lstStyle/>
+          <a:p>
+            <a:pPr algn="l" indent="0" marL="0">
+              <a:lnSpc>
+                <a:spcPts val="1820"/>
+              </a:lnSpc>
+              <a:spcBef>
+                <a:spcPts val="300"/>
+              </a:spcBef>
+              <a:spcAft>
+                <a:spcPts val="300"/>
+              </a:spcAft>
+              <a:buNone/>
+            </a:pPr>
+            <a:r>
+              <a:rPr lang="en-US" sz="1300" i="1" dirty="0">
+                <a:solidFill>
+                  <a:srgbClr val="1C2833"/>
+                </a:solidFill>
+                <a:latin typeface="Georgia" pitchFamily="34" charset="0"/>
+                <a:ea typeface="Georgia" pitchFamily="34" charset="-122"/>
+                <a:cs typeface="Georgia" pitchFamily="34" charset="-120"/>
+              </a:rPr>
+              <a:t>Tomorrow you present.</a:t>
+            </a:r>
+            <a:endParaRPr lang="en-US" sz="1300" dirty="0"/>
+          </a:p>
+        </p:txBody>
+      </p:sp>
+      <p:sp>
+        <p:nvSpPr>
+          <p:cNvPr id="16" name="Text 14"/>
+          <p:cNvSpPr/>
+          <p:nvPr/>
+        </p:nvSpPr>
+        <p:spPr>
+          <a:xfrm>
+            <a:off x="406301" y="4434929"/>
             <a:ext cx="8498026" cy="213271"/>
           </a:xfrm>
           <a:prstGeom prst="rect">
@@ -2551,7 +3360,903 @@
                 <a:ea typeface="Arial" pitchFamily="34" charset="-122"/>
                 <a:cs typeface="Arial" pitchFamily="34" charset="-120"/>
               </a:rPr>
-              <a:t>– Verified per pair during refine half.</a:t>
+              <a:t>Middle ·  · IKS Curriculum</a:t>
+            </a:r>
+            <a:endParaRPr lang="en-US" sz="1200" dirty="0"/>
+          </a:p>
+        </p:txBody>
+      </p:sp>
+    </p:spTree>
+  </p:cSld>
+  <p:clrMapOvr>
+    <a:masterClrMapping/>
+  </p:clrMapOvr>
+</p:sld>
+</file>
+
+<file path=ppt/slides/slide12.xml><?xml version="1.0" encoding="utf-8"?>
+<p:sld xmlns:a="http://schemas.openxmlformats.org/drawingml/2006/main" xmlns:r="http://schemas.openxmlformats.org/officeDocument/2006/relationships" xmlns:p="http://schemas.openxmlformats.org/presentationml/2006/main">
+  <p:cSld name="Slide 12">
+    <p:bg>
+      <p:bgPr>
+        <a:solidFill>
+          <a:srgbClr val="FFFFFF"/>
+        </a:solidFill>
+      </p:bgPr>
+    </p:bg>
+    <p:spTree>
+      <p:nvGrpSpPr>
+        <p:cNvPr id="1" name=""/>
+        <p:cNvGrpSpPr/>
+        <p:nvPr/>
+      </p:nvGrpSpPr>
+      <p:grpSpPr>
+        <a:xfrm>
+          <a:off x="0" y="0"/>
+          <a:ext cx="0" cy="0"/>
+          <a:chOff x="0" y="0"/>
+          <a:chExt cx="0" cy="0"/>
+        </a:xfrm>
+      </p:grpSpPr>
+      <p:sp>
+        <p:nvSpPr>
+          <p:cNvPr id="2" name="Text 0"/>
+          <p:cNvSpPr/>
+          <p:nvPr/>
+        </p:nvSpPr>
+        <p:spPr>
+          <a:xfrm>
+            <a:off x="0" y="0"/>
+            <a:ext cx="9144000" cy="101501"/>
+          </a:xfrm>
+          <a:prstGeom prst="rect">
+            <a:avLst/>
+          </a:prstGeom>
+          <a:solidFill>
+            <a:srgbClr val="277884"/>
+          </a:solidFill>
+          <a:ln/>
+        </p:spPr>
+        <p:txBody>
+          <a:bodyPr wrap="square" rtlCol="0" anchor="ctr"/>
+          <a:lstStyle/>
+          <a:p>
+            <a:pPr indent="0" marL="0">
+              <a:buNone/>
+            </a:pPr>
+            <a:endParaRPr lang="en-US" dirty="0"/>
+          </a:p>
+        </p:txBody>
+      </p:sp>
+      <p:sp>
+        <p:nvSpPr>
+          <p:cNvPr id="3" name="Text 1"/>
+          <p:cNvSpPr/>
+          <p:nvPr/>
+        </p:nvSpPr>
+        <p:spPr>
+          <a:xfrm>
+            <a:off x="406301" y="457051"/>
+            <a:ext cx="8498026" cy="274290"/>
+          </a:xfrm>
+          <a:prstGeom prst="rect">
+            <a:avLst/>
+          </a:prstGeom>
+          <a:noFill/>
+          <a:ln/>
+        </p:spPr>
+        <p:txBody>
+          <a:bodyPr wrap="square" lIns="0" tIns="0" rIns="0" bIns="0" rtlCol="0" anchor="t"/>
+          <a:lstStyle/>
+          <a:p>
+            <a:pPr algn="l" indent="0" marL="0">
+              <a:lnSpc>
+                <a:spcPts val="2160"/>
+              </a:lnSpc>
+              <a:spcBef>
+                <a:spcPts val="600"/>
+              </a:spcBef>
+              <a:spcAft>
+                <a:spcPts val="800"/>
+              </a:spcAft>
+              <a:buNone/>
+            </a:pPr>
+            <a:r>
+              <a:rPr lang="en-US" sz="1800" b="1" dirty="0">
+                <a:solidFill>
+                  <a:srgbClr val="FE4447"/>
+                </a:solidFill>
+                <a:latin typeface="Georgia" pitchFamily="34" charset="0"/>
+                <a:ea typeface="Georgia" pitchFamily="34" charset="-122"/>
+                <a:cs typeface="Georgia" pitchFamily="34" charset="-120"/>
+              </a:rPr>
+              <a:t>Homework</a:t>
+            </a:r>
+            <a:endParaRPr lang="en-US" sz="1800" dirty="0"/>
+          </a:p>
+        </p:txBody>
+      </p:sp>
+      <p:sp>
+        <p:nvSpPr>
+          <p:cNvPr id="4" name="Text 2"/>
+          <p:cNvSpPr/>
+          <p:nvPr/>
+        </p:nvSpPr>
+        <p:spPr>
+          <a:xfrm>
+            <a:off x="634901" y="883593"/>
+            <a:ext cx="8102798" cy="281880"/>
+          </a:xfrm>
+          <a:prstGeom prst="rect">
+            <a:avLst/>
+          </a:prstGeom>
+          <a:noFill/>
+          <a:ln/>
+        </p:spPr>
+        <p:txBody>
+          <a:bodyPr wrap="square" lIns="0" tIns="0" rIns="0" bIns="0" rtlCol="0" anchor="t"/>
+          <a:lstStyle/>
+          <a:p>
+            <a:pPr algn="l" marL="342900" indent="-342900">
+              <a:lnSpc>
+                <a:spcPts val="1620"/>
+              </a:lnSpc>
+              <a:spcAft>
+                <a:spcPts val="300"/>
+              </a:spcAft>
+              <a:buSzPct val="100000"/>
+              <a:buChar char="•"/>
+            </a:pPr>
+            <a:r>
+              <a:rPr lang="en-US" sz="1200" dirty="0">
+                <a:solidFill>
+                  <a:srgbClr val="1C2833"/>
+                </a:solidFill>
+                <a:latin typeface="Arial" pitchFamily="34" charset="0"/>
+                <a:ea typeface="Arial" pitchFamily="34" charset="-122"/>
+                <a:cs typeface="Arial" pitchFamily="34" charset="-120"/>
+              </a:rPr>
+              <a:t>Final touches at home tonight. Bring everything tomorrow.</a:t>
+            </a:r>
+            <a:endParaRPr lang="en-US" sz="1200" dirty="0"/>
+          </a:p>
+        </p:txBody>
+      </p:sp>
+      <p:sp>
+        <p:nvSpPr>
+          <p:cNvPr id="5" name="Text 3"/>
+          <p:cNvSpPr/>
+          <p:nvPr/>
+        </p:nvSpPr>
+        <p:spPr>
+          <a:xfrm>
+            <a:off x="406301" y="4434929"/>
+            <a:ext cx="8498026" cy="213271"/>
+          </a:xfrm>
+          <a:prstGeom prst="rect">
+            <a:avLst/>
+          </a:prstGeom>
+          <a:noFill/>
+          <a:ln/>
+        </p:spPr>
+        <p:txBody>
+          <a:bodyPr wrap="square" lIns="0" tIns="0" rIns="0" bIns="0" rtlCol="0" anchor="t"/>
+          <a:lstStyle/>
+          <a:p>
+            <a:pPr algn="l" indent="0" marL="0">
+              <a:lnSpc>
+                <a:spcPts val="1680"/>
+              </a:lnSpc>
+              <a:spcBef>
+                <a:spcPts val="300"/>
+              </a:spcBef>
+              <a:spcAft>
+                <a:spcPts val="300"/>
+              </a:spcAft>
+              <a:buNone/>
+            </a:pPr>
+            <a:r>
+              <a:rPr lang="en-US" sz="1200" dirty="0">
+                <a:solidFill>
+                  <a:srgbClr val="1C2833"/>
+                </a:solidFill>
+                <a:latin typeface="Arial" pitchFamily="34" charset="0"/>
+                <a:ea typeface="Arial" pitchFamily="34" charset="-122"/>
+                <a:cs typeface="Arial" pitchFamily="34" charset="-120"/>
+              </a:rPr>
+              <a:t>Middle ·  · IKS Curriculum</a:t>
+            </a:r>
+            <a:endParaRPr lang="en-US" sz="1200" dirty="0"/>
+          </a:p>
+        </p:txBody>
+      </p:sp>
+    </p:spTree>
+  </p:cSld>
+  <p:clrMapOvr>
+    <a:masterClrMapping/>
+  </p:clrMapOvr>
+</p:sld>
+</file>
+
+<file path=ppt/slides/slide13.xml><?xml version="1.0" encoding="utf-8"?>
+<p:sld xmlns:a="http://schemas.openxmlformats.org/drawingml/2006/main" xmlns:r="http://schemas.openxmlformats.org/officeDocument/2006/relationships" xmlns:p="http://schemas.openxmlformats.org/presentationml/2006/main">
+  <p:cSld name="Slide 13">
+    <p:bg>
+      <p:bgPr>
+        <a:solidFill>
+          <a:srgbClr val="FFFFFF"/>
+        </a:solidFill>
+      </p:bgPr>
+    </p:bg>
+    <p:spTree>
+      <p:nvGrpSpPr>
+        <p:cNvPr id="1" name=""/>
+        <p:cNvGrpSpPr/>
+        <p:nvPr/>
+      </p:nvGrpSpPr>
+      <p:grpSpPr>
+        <a:xfrm>
+          <a:off x="0" y="0"/>
+          <a:ext cx="0" cy="0"/>
+          <a:chOff x="0" y="0"/>
+          <a:chExt cx="0" cy="0"/>
+        </a:xfrm>
+      </p:grpSpPr>
+      <p:sp>
+        <p:nvSpPr>
+          <p:cNvPr id="2" name="Text 0"/>
+          <p:cNvSpPr/>
+          <p:nvPr/>
+        </p:nvSpPr>
+        <p:spPr>
+          <a:xfrm>
+            <a:off x="0" y="0"/>
+            <a:ext cx="9144000" cy="101501"/>
+          </a:xfrm>
+          <a:prstGeom prst="rect">
+            <a:avLst/>
+          </a:prstGeom>
+          <a:solidFill>
+            <a:srgbClr val="277884"/>
+          </a:solidFill>
+          <a:ln/>
+        </p:spPr>
+        <p:txBody>
+          <a:bodyPr wrap="square" rtlCol="0" anchor="ctr"/>
+          <a:lstStyle/>
+          <a:p>
+            <a:pPr indent="0" marL="0">
+              <a:buNone/>
+            </a:pPr>
+            <a:endParaRPr lang="en-US" dirty="0"/>
+          </a:p>
+        </p:txBody>
+      </p:sp>
+      <p:sp>
+        <p:nvSpPr>
+          <p:cNvPr id="3" name="Text 1"/>
+          <p:cNvSpPr/>
+          <p:nvPr/>
+        </p:nvSpPr>
+        <p:spPr>
+          <a:xfrm>
+            <a:off x="406301" y="457051"/>
+            <a:ext cx="8498026" cy="274290"/>
+          </a:xfrm>
+          <a:prstGeom prst="rect">
+            <a:avLst/>
+          </a:prstGeom>
+          <a:noFill/>
+          <a:ln/>
+        </p:spPr>
+        <p:txBody>
+          <a:bodyPr wrap="square" lIns="0" tIns="0" rIns="0" bIns="0" rtlCol="0" anchor="t"/>
+          <a:lstStyle/>
+          <a:p>
+            <a:pPr algn="l" indent="0" marL="0">
+              <a:lnSpc>
+                <a:spcPts val="2160"/>
+              </a:lnSpc>
+              <a:spcBef>
+                <a:spcPts val="600"/>
+              </a:spcBef>
+              <a:spcAft>
+                <a:spcPts val="800"/>
+              </a:spcAft>
+              <a:buNone/>
+            </a:pPr>
+            <a:r>
+              <a:rPr lang="en-US" sz="1800" b="1" dirty="0">
+                <a:solidFill>
+                  <a:srgbClr val="FE4447"/>
+                </a:solidFill>
+                <a:latin typeface="Georgia" pitchFamily="34" charset="0"/>
+                <a:ea typeface="Georgia" pitchFamily="34" charset="-122"/>
+                <a:cs typeface="Georgia" pitchFamily="34" charset="-120"/>
+              </a:rPr>
+              <a:t>Differentiation</a:t>
+            </a:r>
+            <a:endParaRPr lang="en-US" sz="1800" dirty="0"/>
+          </a:p>
+        </p:txBody>
+      </p:sp>
+      <p:sp>
+        <p:nvSpPr>
+          <p:cNvPr id="4" name="Text 2"/>
+          <p:cNvSpPr/>
+          <p:nvPr/>
+        </p:nvSpPr>
+        <p:spPr>
+          <a:xfrm>
+            <a:off x="634901" y="883593"/>
+            <a:ext cx="8102798" cy="525661"/>
+          </a:xfrm>
+          <a:prstGeom prst="rect">
+            <a:avLst/>
+          </a:prstGeom>
+          <a:noFill/>
+          <a:ln/>
+        </p:spPr>
+        <p:txBody>
+          <a:bodyPr wrap="square" lIns="0" tIns="0" rIns="0" bIns="0" rtlCol="0" anchor="t"/>
+          <a:lstStyle/>
+          <a:p>
+            <a:pPr algn="l" marL="342900" indent="-342900">
+              <a:lnSpc>
+                <a:spcPts val="1620"/>
+              </a:lnSpc>
+              <a:spcAft>
+                <a:spcPts val="300"/>
+              </a:spcAft>
+              <a:buSzPct val="100000"/>
+              <a:buChar char="•"/>
+            </a:pPr>
+            <a:r>
+              <a:rPr lang="en-US" sz="1200" b="1" dirty="0">
+                <a:solidFill>
+                  <a:srgbClr val="1C2833"/>
+                </a:solidFill>
+                <a:latin typeface="Arial" pitchFamily="34" charset="0"/>
+                <a:ea typeface="Arial" pitchFamily="34" charset="-122"/>
+                <a:cs typeface="Arial" pitchFamily="34" charset="-120"/>
+              </a:rPr>
+              <a:t>One tier up:</a:t>
+            </a:r>
+            <a:pPr algn="l" indent="0" marL="0">
+              <a:lnSpc>
+                <a:spcPts val="1620"/>
+              </a:lnSpc>
+              <a:spcAft>
+                <a:spcPts val="300"/>
+              </a:spcAft>
+              <a:buNone/>
+            </a:pPr>
+            <a:r>
+              <a:rPr lang="en-US" sz="1200" dirty="0">
+                <a:solidFill>
+                  <a:srgbClr val="1C2833"/>
+                </a:solidFill>
+                <a:latin typeface="Arial" pitchFamily="34" charset="0"/>
+                <a:ea typeface="Arial" pitchFamily="34" charset="-122"/>
+                <a:cs typeface="Arial" pitchFamily="34" charset="-120"/>
+              </a:rPr>
+              <a:t> Add a Q&amp;A-ready note: anticipate one tricky question from the audience and prepare a 30-second answer.</a:t>
+            </a:r>
+            <a:endParaRPr lang="en-US" sz="1200" dirty="0"/>
+          </a:p>
+          <a:p>
+            <a:pPr algn="l" marL="342900" indent="-342900">
+              <a:lnSpc>
+                <a:spcPts val="1620"/>
+              </a:lnSpc>
+              <a:spcAft>
+                <a:spcPts val="300"/>
+              </a:spcAft>
+              <a:buSzPct val="100000"/>
+              <a:buChar char="•"/>
+            </a:pPr>
+            <a:r>
+              <a:rPr lang="en-US" sz="1200" b="1" dirty="0">
+                <a:solidFill>
+                  <a:srgbClr val="1C2833"/>
+                </a:solidFill>
+                <a:latin typeface="Arial" pitchFamily="34" charset="0"/>
+                <a:ea typeface="Arial" pitchFamily="34" charset="-122"/>
+                <a:cs typeface="Arial" pitchFamily="34" charset="-120"/>
+              </a:rPr>
+              <a:t>One tier down:</a:t>
+            </a:r>
+            <a:pPr algn="l" indent="0" marL="0">
+              <a:lnSpc>
+                <a:spcPts val="1620"/>
+              </a:lnSpc>
+              <a:spcAft>
+                <a:spcPts val="300"/>
+              </a:spcAft>
+              <a:buNone/>
+            </a:pPr>
+            <a:r>
+              <a:rPr lang="en-US" sz="1200" dirty="0">
+                <a:solidFill>
+                  <a:srgbClr val="1C2833"/>
+                </a:solidFill>
+                <a:latin typeface="Arial" pitchFamily="34" charset="0"/>
+                <a:ea typeface="Arial" pitchFamily="34" charset="-122"/>
+                <a:cs typeface="Arial" pitchFamily="34" charset="-120"/>
+              </a:rPr>
+              <a:t> Allow reading from a written script for the presentation. The goal is communication, not memorisation.</a:t>
+            </a:r>
+            <a:endParaRPr lang="en-US" sz="1200" dirty="0"/>
+          </a:p>
+        </p:txBody>
+      </p:sp>
+      <p:sp>
+        <p:nvSpPr>
+          <p:cNvPr id="5" name="Text 3"/>
+          <p:cNvSpPr/>
+          <p:nvPr/>
+        </p:nvSpPr>
+        <p:spPr>
+          <a:xfrm>
+            <a:off x="406301" y="4434929"/>
+            <a:ext cx="8498026" cy="213271"/>
+          </a:xfrm>
+          <a:prstGeom prst="rect">
+            <a:avLst/>
+          </a:prstGeom>
+          <a:noFill/>
+          <a:ln/>
+        </p:spPr>
+        <p:txBody>
+          <a:bodyPr wrap="square" lIns="0" tIns="0" rIns="0" bIns="0" rtlCol="0" anchor="t"/>
+          <a:lstStyle/>
+          <a:p>
+            <a:pPr algn="l" indent="0" marL="0">
+              <a:lnSpc>
+                <a:spcPts val="1680"/>
+              </a:lnSpc>
+              <a:spcBef>
+                <a:spcPts val="300"/>
+              </a:spcBef>
+              <a:spcAft>
+                <a:spcPts val="300"/>
+              </a:spcAft>
+              <a:buNone/>
+            </a:pPr>
+            <a:r>
+              <a:rPr lang="en-US" sz="1200" dirty="0">
+                <a:solidFill>
+                  <a:srgbClr val="1C2833"/>
+                </a:solidFill>
+                <a:latin typeface="Arial" pitchFamily="34" charset="0"/>
+                <a:ea typeface="Arial" pitchFamily="34" charset="-122"/>
+                <a:cs typeface="Arial" pitchFamily="34" charset="-120"/>
+              </a:rPr>
+              <a:t>Middle ·  · IKS Curriculum</a:t>
+            </a:r>
+            <a:endParaRPr lang="en-US" sz="1200" dirty="0"/>
+          </a:p>
+        </p:txBody>
+      </p:sp>
+    </p:spTree>
+  </p:cSld>
+  <p:clrMapOvr>
+    <a:masterClrMapping/>
+  </p:clrMapOvr>
+</p:sld>
+</file>
+
+<file path=ppt/slides/slide14.xml><?xml version="1.0" encoding="utf-8"?>
+<p:sld xmlns:a="http://schemas.openxmlformats.org/drawingml/2006/main" xmlns:r="http://schemas.openxmlformats.org/officeDocument/2006/relationships" xmlns:p="http://schemas.openxmlformats.org/presentationml/2006/main">
+  <p:cSld name="Slide 14">
+    <p:bg>
+      <p:bgPr>
+        <a:solidFill>
+          <a:srgbClr val="FFFFFF"/>
+        </a:solidFill>
+      </p:bgPr>
+    </p:bg>
+    <p:spTree>
+      <p:nvGrpSpPr>
+        <p:cNvPr id="1" name=""/>
+        <p:cNvGrpSpPr/>
+        <p:nvPr/>
+      </p:nvGrpSpPr>
+      <p:grpSpPr>
+        <a:xfrm>
+          <a:off x="0" y="0"/>
+          <a:ext cx="0" cy="0"/>
+          <a:chOff x="0" y="0"/>
+          <a:chExt cx="0" cy="0"/>
+        </a:xfrm>
+      </p:grpSpPr>
+      <p:sp>
+        <p:nvSpPr>
+          <p:cNvPr id="2" name="Text 0"/>
+          <p:cNvSpPr/>
+          <p:nvPr/>
+        </p:nvSpPr>
+        <p:spPr>
+          <a:xfrm>
+            <a:off x="0" y="0"/>
+            <a:ext cx="9144000" cy="101501"/>
+          </a:xfrm>
+          <a:prstGeom prst="rect">
+            <a:avLst/>
+          </a:prstGeom>
+          <a:solidFill>
+            <a:srgbClr val="277884"/>
+          </a:solidFill>
+          <a:ln/>
+        </p:spPr>
+        <p:txBody>
+          <a:bodyPr wrap="square" rtlCol="0" anchor="ctr"/>
+          <a:lstStyle/>
+          <a:p>
+            <a:pPr indent="0" marL="0">
+              <a:buNone/>
+            </a:pPr>
+            <a:endParaRPr lang="en-US" dirty="0"/>
+          </a:p>
+        </p:txBody>
+      </p:sp>
+      <p:sp>
+        <p:nvSpPr>
+          <p:cNvPr id="3" name="Text 1"/>
+          <p:cNvSpPr/>
+          <p:nvPr/>
+        </p:nvSpPr>
+        <p:spPr>
+          <a:xfrm>
+            <a:off x="406301" y="457051"/>
+            <a:ext cx="8498026" cy="274290"/>
+          </a:xfrm>
+          <a:prstGeom prst="rect">
+            <a:avLst/>
+          </a:prstGeom>
+          <a:noFill/>
+          <a:ln/>
+        </p:spPr>
+        <p:txBody>
+          <a:bodyPr wrap="square" lIns="0" tIns="0" rIns="0" bIns="0" rtlCol="0" anchor="t"/>
+          <a:lstStyle/>
+          <a:p>
+            <a:pPr algn="l" indent="0" marL="0">
+              <a:lnSpc>
+                <a:spcPts val="2160"/>
+              </a:lnSpc>
+              <a:spcBef>
+                <a:spcPts val="600"/>
+              </a:spcBef>
+              <a:spcAft>
+                <a:spcPts val="800"/>
+              </a:spcAft>
+              <a:buNone/>
+            </a:pPr>
+            <a:r>
+              <a:rPr lang="en-US" sz="1800" b="1" dirty="0">
+                <a:solidFill>
+                  <a:srgbClr val="FE4447"/>
+                </a:solidFill>
+                <a:latin typeface="Georgia" pitchFamily="34" charset="0"/>
+                <a:ea typeface="Georgia" pitchFamily="34" charset="-122"/>
+                <a:cs typeface="Georgia" pitchFamily="34" charset="-120"/>
+              </a:rPr>
+              <a:t>Teacher notes</a:t>
+            </a:r>
+            <a:endParaRPr lang="en-US" sz="1800" dirty="0"/>
+          </a:p>
+        </p:txBody>
+      </p:sp>
+      <p:sp>
+        <p:nvSpPr>
+          <p:cNvPr id="4" name="Text 2"/>
+          <p:cNvSpPr/>
+          <p:nvPr/>
+        </p:nvSpPr>
+        <p:spPr>
+          <a:xfrm>
+            <a:off x="634901" y="883593"/>
+            <a:ext cx="8102798" cy="731341"/>
+          </a:xfrm>
+          <a:prstGeom prst="rect">
+            <a:avLst/>
+          </a:prstGeom>
+          <a:noFill/>
+          <a:ln/>
+        </p:spPr>
+        <p:txBody>
+          <a:bodyPr wrap="square" lIns="0" tIns="0" rIns="0" bIns="0" rtlCol="0" anchor="t"/>
+          <a:lstStyle/>
+          <a:p>
+            <a:pPr algn="l" marL="342900" indent="-342900">
+              <a:lnSpc>
+                <a:spcPts val="1620"/>
+              </a:lnSpc>
+              <a:spcAft>
+                <a:spcPts val="300"/>
+              </a:spcAft>
+              <a:buSzPct val="100000"/>
+              <a:buChar char="•"/>
+            </a:pPr>
+            <a:r>
+              <a:rPr lang="en-US" sz="1200" dirty="0">
+                <a:solidFill>
+                  <a:srgbClr val="1C2833"/>
+                </a:solidFill>
+                <a:latin typeface="Arial" pitchFamily="34" charset="0"/>
+                <a:ea typeface="Arial" pitchFamily="34" charset="-122"/>
+                <a:cs typeface="Arial" pitchFamily="34" charset="-120"/>
+              </a:rPr>
+              <a:t>The "buddy pair" rehearsal often surfaces problems the teacher missed. Encourage students to be </a:t>
+            </a:r>
+            <a:pPr algn="l" indent="0" marL="0">
+              <a:lnSpc>
+                <a:spcPts val="1620"/>
+              </a:lnSpc>
+              <a:spcAft>
+                <a:spcPts val="300"/>
+              </a:spcAft>
+              <a:buNone/>
+            </a:pPr>
+            <a:r>
+              <a:rPr lang="en-US" sz="1200" i="1" dirty="0">
+                <a:solidFill>
+                  <a:srgbClr val="1C2833"/>
+                </a:solidFill>
+                <a:latin typeface="Arial" pitchFamily="34" charset="0"/>
+                <a:ea typeface="Arial" pitchFamily="34" charset="-122"/>
+                <a:cs typeface="Arial" pitchFamily="34" charset="-120"/>
+              </a:rPr>
+              <a:t>kind and specific</a:t>
+            </a:r>
+            <a:pPr algn="l" indent="0" marL="0">
+              <a:lnSpc>
+                <a:spcPts val="1620"/>
+              </a:lnSpc>
+              <a:spcAft>
+                <a:spcPts val="300"/>
+              </a:spcAft>
+              <a:buNone/>
+            </a:pPr>
+            <a:r>
+              <a:rPr lang="en-US" sz="1200" dirty="0">
+                <a:solidFill>
+                  <a:srgbClr val="1C2833"/>
+                </a:solidFill>
+                <a:latin typeface="Arial" pitchFamily="34" charset="0"/>
+                <a:ea typeface="Arial" pitchFamily="34" charset="-122"/>
+                <a:cs typeface="Arial" pitchFamily="34" charset="-120"/>
+              </a:rPr>
+              <a:t> in their feedback — "the part about water was clear, the part about pollution was rushed" beats "good job."</a:t>
+            </a:r>
+            <a:endParaRPr lang="en-US" sz="1200" dirty="0"/>
+          </a:p>
+          <a:p>
+            <a:pPr algn="l" marL="342900" indent="-342900">
+              <a:lnSpc>
+                <a:spcPts val="1620"/>
+              </a:lnSpc>
+              <a:spcAft>
+                <a:spcPts val="300"/>
+              </a:spcAft>
+              <a:buSzPct val="100000"/>
+              <a:buChar char="•"/>
+            </a:pPr>
+            <a:r>
+              <a:rPr lang="en-US" sz="1200" dirty="0">
+                <a:solidFill>
+                  <a:srgbClr val="1C2833"/>
+                </a:solidFill>
+                <a:latin typeface="Arial" pitchFamily="34" charset="0"/>
+                <a:ea typeface="Arial" pitchFamily="34" charset="-122"/>
+                <a:cs typeface="Arial" pitchFamily="34" charset="-120"/>
+              </a:rPr>
+              <a:t>Pairs who consistently can't fit in 3 minutes are usually trying to say too much. Help them cut.</a:t>
+            </a:r>
+            <a:endParaRPr lang="en-US" sz="1200" dirty="0"/>
+          </a:p>
+        </p:txBody>
+      </p:sp>
+      <p:sp>
+        <p:nvSpPr>
+          <p:cNvPr id="5" name="Text 3"/>
+          <p:cNvSpPr/>
+          <p:nvPr/>
+        </p:nvSpPr>
+        <p:spPr>
+          <a:xfrm>
+            <a:off x="406301" y="4434929"/>
+            <a:ext cx="8498026" cy="213271"/>
+          </a:xfrm>
+          <a:prstGeom prst="rect">
+            <a:avLst/>
+          </a:prstGeom>
+          <a:noFill/>
+          <a:ln/>
+        </p:spPr>
+        <p:txBody>
+          <a:bodyPr wrap="square" lIns="0" tIns="0" rIns="0" bIns="0" rtlCol="0" anchor="t"/>
+          <a:lstStyle/>
+          <a:p>
+            <a:pPr algn="l" indent="0" marL="0">
+              <a:lnSpc>
+                <a:spcPts val="1680"/>
+              </a:lnSpc>
+              <a:spcBef>
+                <a:spcPts val="300"/>
+              </a:spcBef>
+              <a:spcAft>
+                <a:spcPts val="300"/>
+              </a:spcAft>
+              <a:buNone/>
+            </a:pPr>
+            <a:r>
+              <a:rPr lang="en-US" sz="1200" dirty="0">
+                <a:solidFill>
+                  <a:srgbClr val="1C2833"/>
+                </a:solidFill>
+                <a:latin typeface="Arial" pitchFamily="34" charset="0"/>
+                <a:ea typeface="Arial" pitchFamily="34" charset="-122"/>
+                <a:cs typeface="Arial" pitchFamily="34" charset="-120"/>
+              </a:rPr>
+              <a:t>Middle ·  · IKS Curriculum</a:t>
+            </a:r>
+            <a:endParaRPr lang="en-US" sz="1200" dirty="0"/>
+          </a:p>
+        </p:txBody>
+      </p:sp>
+    </p:spTree>
+  </p:cSld>
+  <p:clrMapOvr>
+    <a:masterClrMapping/>
+  </p:clrMapOvr>
+</p:sld>
+</file>
+
+<file path=ppt/slides/slide15.xml><?xml version="1.0" encoding="utf-8"?>
+<p:sld xmlns:a="http://schemas.openxmlformats.org/drawingml/2006/main" xmlns:r="http://schemas.openxmlformats.org/officeDocument/2006/relationships" xmlns:p="http://schemas.openxmlformats.org/presentationml/2006/main">
+  <p:cSld name="Slide 15">
+    <p:bg>
+      <p:bgPr>
+        <a:solidFill>
+          <a:srgbClr val="FFFFFF"/>
+        </a:solidFill>
+      </p:bgPr>
+    </p:bg>
+    <p:spTree>
+      <p:nvGrpSpPr>
+        <p:cNvPr id="1" name=""/>
+        <p:cNvGrpSpPr/>
+        <p:nvPr/>
+      </p:nvGrpSpPr>
+      <p:grpSpPr>
+        <a:xfrm>
+          <a:off x="0" y="0"/>
+          <a:ext cx="0" cy="0"/>
+          <a:chOff x="0" y="0"/>
+          <a:chExt cx="0" cy="0"/>
+        </a:xfrm>
+      </p:grpSpPr>
+      <p:sp>
+        <p:nvSpPr>
+          <p:cNvPr id="2" name="Text 0"/>
+          <p:cNvSpPr/>
+          <p:nvPr/>
+        </p:nvSpPr>
+        <p:spPr>
+          <a:xfrm>
+            <a:off x="0" y="0"/>
+            <a:ext cx="9144000" cy="101501"/>
+          </a:xfrm>
+          <a:prstGeom prst="rect">
+            <a:avLst/>
+          </a:prstGeom>
+          <a:solidFill>
+            <a:srgbClr val="277884"/>
+          </a:solidFill>
+          <a:ln/>
+        </p:spPr>
+        <p:txBody>
+          <a:bodyPr wrap="square" rtlCol="0" anchor="ctr"/>
+          <a:lstStyle/>
+          <a:p>
+            <a:pPr indent="0" marL="0">
+              <a:buNone/>
+            </a:pPr>
+            <a:endParaRPr lang="en-US" dirty="0"/>
+          </a:p>
+        </p:txBody>
+      </p:sp>
+      <p:sp>
+        <p:nvSpPr>
+          <p:cNvPr id="3" name="Text 1"/>
+          <p:cNvSpPr/>
+          <p:nvPr/>
+        </p:nvSpPr>
+        <p:spPr>
+          <a:xfrm>
+            <a:off x="406301" y="457051"/>
+            <a:ext cx="8498026" cy="274290"/>
+          </a:xfrm>
+          <a:prstGeom prst="rect">
+            <a:avLst/>
+          </a:prstGeom>
+          <a:noFill/>
+          <a:ln/>
+        </p:spPr>
+        <p:txBody>
+          <a:bodyPr wrap="square" lIns="0" tIns="0" rIns="0" bIns="0" rtlCol="0" anchor="t"/>
+          <a:lstStyle/>
+          <a:p>
+            <a:pPr algn="l" indent="0" marL="0">
+              <a:lnSpc>
+                <a:spcPts val="2160"/>
+              </a:lnSpc>
+              <a:spcBef>
+                <a:spcPts val="600"/>
+              </a:spcBef>
+              <a:spcAft>
+                <a:spcPts val="800"/>
+              </a:spcAft>
+              <a:buNone/>
+            </a:pPr>
+            <a:r>
+              <a:rPr lang="en-US" sz="1800" b="1" dirty="0">
+                <a:solidFill>
+                  <a:srgbClr val="FE4447"/>
+                </a:solidFill>
+                <a:latin typeface="Georgia" pitchFamily="34" charset="0"/>
+                <a:ea typeface="Georgia" pitchFamily="34" charset="-122"/>
+                <a:cs typeface="Georgia" pitchFamily="34" charset="-120"/>
+              </a:rPr>
+              <a:t>Citation(s) used in this lesson</a:t>
+            </a:r>
+            <a:endParaRPr lang="en-US" sz="1800" dirty="0"/>
+          </a:p>
+        </p:txBody>
+      </p:sp>
+      <p:sp>
+        <p:nvSpPr>
+          <p:cNvPr id="4" name="Text 2"/>
+          <p:cNvSpPr/>
+          <p:nvPr/>
+        </p:nvSpPr>
+        <p:spPr>
+          <a:xfrm>
+            <a:off x="634901" y="883593"/>
+            <a:ext cx="8102798" cy="281880"/>
+          </a:xfrm>
+          <a:prstGeom prst="rect">
+            <a:avLst/>
+          </a:prstGeom>
+          <a:noFill/>
+          <a:ln/>
+        </p:spPr>
+        <p:txBody>
+          <a:bodyPr wrap="square" lIns="0" tIns="0" rIns="0" bIns="0" rtlCol="0" anchor="t"/>
+          <a:lstStyle/>
+          <a:p>
+            <a:pPr algn="l" marL="342900" indent="-342900">
+              <a:lnSpc>
+                <a:spcPts val="1620"/>
+              </a:lnSpc>
+              <a:spcAft>
+                <a:spcPts val="300"/>
+              </a:spcAft>
+              <a:buSzPct val="100000"/>
+              <a:buChar char="•"/>
+            </a:pPr>
+            <a:r>
+              <a:rPr lang="en-US" sz="1200" dirty="0">
+                <a:solidFill>
+                  <a:srgbClr val="1C2833"/>
+                </a:solidFill>
+                <a:latin typeface="Arial" pitchFamily="34" charset="0"/>
+                <a:ea typeface="Arial" pitchFamily="34" charset="-122"/>
+                <a:cs typeface="Arial" pitchFamily="34" charset="-120"/>
+              </a:rPr>
+              <a:t>Verified per pair during refine half.</a:t>
             </a:r>
             <a:endParaRPr lang="en-US" sz="1200" dirty="0"/>
           </a:p>
@@ -2709,7 +4414,7 @@
                 <a:ea typeface="Georgia" pitchFamily="34" charset="-122"/>
                 <a:cs typeface="Georgia" pitchFamily="34" charset="-120"/>
               </a:rPr>
-              <a:t>Materials</a:t>
+              <a:t>Learning objective</a:t>
             </a:r>
             <a:endParaRPr lang="en-US" sz="1800" dirty="0"/>
           </a:p>
@@ -2724,7 +4429,7 @@
         <p:spPr>
           <a:xfrm>
             <a:off x="406301" y="870942"/>
-            <a:ext cx="8498026" cy="213271"/>
+            <a:ext cx="8498026" cy="426541"/>
           </a:xfrm>
           <a:prstGeom prst="rect">
             <a:avLst/>
@@ -2757,7 +4462,7 @@
                 <a:ea typeface="Arial" pitchFamily="34" charset="-122"/>
                 <a:cs typeface="Arial" pitchFamily="34" charset="-120"/>
               </a:rPr>
-              <a:t>– Pairs bring all in-progress materials. – Stopwatch. – Printed feedback form: 1 strength, 1 fix, in 30 seconds.</a:t>
+              <a:t>By the end of this lesson, every pair will have a presentation-ready project artefact and will have rehearsed their 3-minute presentation at least once with timed feedback.</a:t>
             </a:r>
             <a:endParaRPr lang="en-US" sz="1200" dirty="0"/>
           </a:p>
@@ -2915,7 +4620,7 @@
                 <a:ea typeface="Georgia" pitchFamily="34" charset="-122"/>
                 <a:cs typeface="Georgia" pitchFamily="34" charset="-120"/>
               </a:rPr>
-              <a:t>Lesson flow</a:t>
+              <a:t>Materials</a:t>
             </a:r>
             <a:endParaRPr lang="en-US" sz="1800" dirty="0"/>
           </a:p>
@@ -2924,6 +4629,100 @@
       <p:sp>
         <p:nvSpPr>
           <p:cNvPr id="4" name="Text 2"/>
+          <p:cNvSpPr/>
+          <p:nvPr/>
+        </p:nvSpPr>
+        <p:spPr>
+          <a:xfrm>
+            <a:off x="634901" y="883593"/>
+            <a:ext cx="8102798" cy="769441"/>
+          </a:xfrm>
+          <a:prstGeom prst="rect">
+            <a:avLst/>
+          </a:prstGeom>
+          <a:noFill/>
+          <a:ln/>
+        </p:spPr>
+        <p:txBody>
+          <a:bodyPr wrap="square" lIns="0" tIns="0" rIns="0" bIns="0" rtlCol="0" anchor="t"/>
+          <a:lstStyle/>
+          <a:p>
+            <a:pPr algn="l" marL="342900" indent="-342900">
+              <a:lnSpc>
+                <a:spcPts val="1620"/>
+              </a:lnSpc>
+              <a:spcAft>
+                <a:spcPts val="300"/>
+              </a:spcAft>
+              <a:buSzPct val="100000"/>
+              <a:buChar char="•"/>
+            </a:pPr>
+            <a:r>
+              <a:rPr lang="en-US" sz="1200" dirty="0">
+                <a:solidFill>
+                  <a:srgbClr val="1C2833"/>
+                </a:solidFill>
+                <a:latin typeface="Arial" pitchFamily="34" charset="0"/>
+                <a:ea typeface="Arial" pitchFamily="34" charset="-122"/>
+                <a:cs typeface="Arial" pitchFamily="34" charset="-120"/>
+              </a:rPr>
+              <a:t>Pairs bring all in-progress materials.</a:t>
+            </a:r>
+            <a:endParaRPr lang="en-US" sz="1200" dirty="0"/>
+          </a:p>
+          <a:p>
+            <a:pPr algn="l" marL="342900" indent="-342900">
+              <a:lnSpc>
+                <a:spcPts val="1620"/>
+              </a:lnSpc>
+              <a:spcAft>
+                <a:spcPts val="300"/>
+              </a:spcAft>
+              <a:buSzPct val="100000"/>
+              <a:buChar char="•"/>
+            </a:pPr>
+            <a:r>
+              <a:rPr lang="en-US" sz="1200" dirty="0">
+                <a:solidFill>
+                  <a:srgbClr val="1C2833"/>
+                </a:solidFill>
+                <a:latin typeface="Arial" pitchFamily="34" charset="0"/>
+                <a:ea typeface="Arial" pitchFamily="34" charset="-122"/>
+                <a:cs typeface="Arial" pitchFamily="34" charset="-120"/>
+              </a:rPr>
+              <a:t>Stopwatch.</a:t>
+            </a:r>
+            <a:endParaRPr lang="en-US" sz="1200" dirty="0"/>
+          </a:p>
+          <a:p>
+            <a:pPr algn="l" marL="342900" indent="-342900">
+              <a:lnSpc>
+                <a:spcPts val="1620"/>
+              </a:lnSpc>
+              <a:spcAft>
+                <a:spcPts val="300"/>
+              </a:spcAft>
+              <a:buSzPct val="100000"/>
+              <a:buChar char="•"/>
+            </a:pPr>
+            <a:r>
+              <a:rPr lang="en-US" sz="1200" dirty="0">
+                <a:solidFill>
+                  <a:srgbClr val="1C2833"/>
+                </a:solidFill>
+                <a:latin typeface="Arial" pitchFamily="34" charset="0"/>
+                <a:ea typeface="Arial" pitchFamily="34" charset="-122"/>
+                <a:cs typeface="Arial" pitchFamily="34" charset="-120"/>
+              </a:rPr>
+              <a:t>Printed feedback form: 1 strength, 1 fix, in 30 seconds.</a:t>
+            </a:r>
+            <a:endParaRPr lang="en-US" sz="1200" dirty="0"/>
+          </a:p>
+        </p:txBody>
+      </p:sp>
+      <p:sp>
+        <p:nvSpPr>
+          <p:cNvPr id="5" name="Text 3"/>
           <p:cNvSpPr/>
           <p:nvPr/>
         </p:nvSpPr>
@@ -3073,7 +4872,7 @@
                 <a:ea typeface="Georgia" pitchFamily="34" charset="-122"/>
                 <a:cs typeface="Georgia" pitchFamily="34" charset="-120"/>
               </a:rPr>
-              <a:t>Warm-up (5 min)</a:t>
+              <a:t>Lesson flow</a:t>
             </a:r>
             <a:endParaRPr lang="en-US" sz="1800" dirty="0"/>
           </a:p>
@@ -3082,100 +4881,6 @@
       <p:sp>
         <p:nvSpPr>
           <p:cNvPr id="4" name="Text 2"/>
-          <p:cNvSpPr/>
-          <p:nvPr/>
-        </p:nvSpPr>
-        <p:spPr>
-          <a:xfrm>
-            <a:off x="406301" y="870942"/>
-            <a:ext cx="8498026" cy="426541"/>
-          </a:xfrm>
-          <a:prstGeom prst="rect">
-            <a:avLst/>
-          </a:prstGeom>
-          <a:noFill/>
-          <a:ln/>
-        </p:spPr>
-        <p:txBody>
-          <a:bodyPr wrap="square" lIns="0" tIns="0" rIns="0" bIns="0" rtlCol="0" anchor="t"/>
-          <a:lstStyle/>
-          <a:p>
-            <a:pPr algn="l" indent="0" marL="0">
-              <a:lnSpc>
-                <a:spcPts val="1680"/>
-              </a:lnSpc>
-              <a:spcBef>
-                <a:spcPts val="300"/>
-              </a:spcBef>
-              <a:spcAft>
-                <a:spcPts val="300"/>
-              </a:spcAft>
-              <a:buNone/>
-            </a:pPr>
-            <a:r>
-              <a:rPr lang="en-US" sz="1200" dirty="0">
-                <a:solidFill>
-                  <a:srgbClr val="1C2833"/>
-                </a:solidFill>
-                <a:latin typeface="Arial" pitchFamily="34" charset="0"/>
-                <a:ea typeface="Arial" pitchFamily="34" charset="-122"/>
-                <a:cs typeface="Arial" pitchFamily="34" charset="-120"/>
-              </a:rPr>
-              <a:t>– Daily prompt — 2 students. – Brief: "Today is </a:t>
-            </a:r>
-            <a:pPr algn="l" indent="0" marL="0">
-              <a:lnSpc>
-                <a:spcPts val="1680"/>
-              </a:lnSpc>
-              <a:spcBef>
-                <a:spcPts val="300"/>
-              </a:spcBef>
-              <a:spcAft>
-                <a:spcPts val="300"/>
-              </a:spcAft>
-              <a:buNone/>
-            </a:pPr>
-            <a:r>
-              <a:rPr lang="en-US" sz="1200" b="1" dirty="0">
-                <a:solidFill>
-                  <a:srgbClr val="1C2833"/>
-                </a:solidFill>
-                <a:latin typeface="Arial" pitchFamily="34" charset="0"/>
-                <a:ea typeface="Arial" pitchFamily="34" charset="-122"/>
-                <a:cs typeface="Arial" pitchFamily="34" charset="-120"/>
-              </a:rPr>
-              <a:t>refine + rehearse</a:t>
-            </a:r>
-            <a:pPr algn="l" indent="0" marL="0">
-              <a:lnSpc>
-                <a:spcPts val="1680"/>
-              </a:lnSpc>
-              <a:spcBef>
-                <a:spcPts val="300"/>
-              </a:spcBef>
-              <a:spcAft>
-                <a:spcPts val="300"/>
-              </a:spcAft>
-              <a:buNone/>
-            </a:pPr>
-            <a:r>
-              <a:rPr lang="en-US" sz="1200" dirty="0">
-                <a:solidFill>
-                  <a:srgbClr val="1C2833"/>
-                </a:solidFill>
-                <a:latin typeface="Arial" pitchFamily="34" charset="0"/>
-                <a:ea typeface="Arial" pitchFamily="34" charset="-122"/>
-                <a:cs typeface="Arial" pitchFamily="34" charset="-120"/>
-              </a:rPr>
-              <a:t>. By end of class, you'll have presented to one other pair and gotten feedback."</a:t>
-            </a:r>
-            <a:endParaRPr lang="en-US" sz="1200" dirty="0"/>
-          </a:p>
-        </p:txBody>
-      </p:sp>
-      <p:sp>
-        <p:nvSpPr>
-          <p:cNvPr id="5" name="Text 3"/>
           <p:cNvSpPr/>
           <p:nvPr/>
         </p:nvSpPr>
@@ -3325,7 +5030,7 @@
                 <a:ea typeface="Georgia" pitchFamily="34" charset="-122"/>
                 <a:cs typeface="Georgia" pitchFamily="34" charset="-120"/>
               </a:rPr>
-              <a:t>Core (30 min)</a:t>
+              <a:t>Warm-up (5 min)</a:t>
             </a:r>
             <a:endParaRPr lang="en-US" sz="1800" dirty="0"/>
           </a:p>
@@ -3339,8 +5044,8 @@
         </p:nvSpPr>
         <p:spPr>
           <a:xfrm>
-            <a:off x="406301" y="870942"/>
-            <a:ext cx="8498026" cy="213271"/>
+            <a:off x="634901" y="883593"/>
+            <a:ext cx="8102798" cy="525661"/>
           </a:xfrm>
           <a:prstGeom prst="rect">
             <a:avLst/>
@@ -3352,20 +5057,18 @@
           <a:bodyPr wrap="square" lIns="0" tIns="0" rIns="0" bIns="0" rtlCol="0" anchor="t"/>
           <a:lstStyle/>
           <a:p>
-            <a:pPr algn="l" indent="0" marL="0">
-              <a:lnSpc>
-                <a:spcPts val="1680"/>
-              </a:lnSpc>
-              <a:spcBef>
-                <a:spcPts val="300"/>
-              </a:spcBef>
-              <a:spcAft>
-                <a:spcPts val="300"/>
-              </a:spcAft>
-              <a:buNone/>
-            </a:pPr>
-            <a:r>
-              <a:rPr lang="en-US" sz="1200" b="1" dirty="0">
+            <a:pPr algn="l" marL="342900" indent="-342900">
+              <a:lnSpc>
+                <a:spcPts val="1620"/>
+              </a:lnSpc>
+              <a:spcAft>
+                <a:spcPts val="300"/>
+              </a:spcAft>
+              <a:buSzPct val="100000"/>
+              <a:buChar char="•"/>
+            </a:pPr>
+            <a:r>
+              <a:rPr lang="en-US" sz="1200" dirty="0">
                 <a:solidFill>
                   <a:srgbClr val="1C2833"/>
                 </a:solidFill>
@@ -3373,19 +5076,20 @@
                 <a:ea typeface="Arial" pitchFamily="34" charset="-122"/>
                 <a:cs typeface="Arial" pitchFamily="34" charset="-120"/>
               </a:rPr>
-              <a:t>Structure:</a:t>
-            </a:r>
-            <a:pPr algn="l" indent="0" marL="0">
-              <a:lnSpc>
-                <a:spcPts val="1680"/>
-              </a:lnSpc>
-              <a:spcBef>
-                <a:spcPts val="300"/>
-              </a:spcBef>
-              <a:spcAft>
-                <a:spcPts val="300"/>
-              </a:spcAft>
-              <a:buNone/>
+              <a:t>Daily prompt — 2 students.</a:t>
+            </a:r>
+            <a:endParaRPr lang="en-US" sz="1200" dirty="0"/>
+          </a:p>
+          <a:p>
+            <a:pPr algn="l" marL="342900" indent="-342900">
+              <a:lnSpc>
+                <a:spcPts val="1620"/>
+              </a:lnSpc>
+              <a:spcAft>
+                <a:spcPts val="300"/>
+              </a:spcAft>
+              <a:buSzPct val="100000"/>
+              <a:buChar char="•"/>
             </a:pPr>
             <a:r>
               <a:rPr lang="en-US" sz="1200" dirty="0">
@@ -3396,42 +5100,16 @@
                 <a:ea typeface="Arial" pitchFamily="34" charset="-122"/>
                 <a:cs typeface="Arial" pitchFamily="34" charset="-120"/>
               </a:rPr>
-              <a:t> Two 15-minute halves.</a:t>
-            </a:r>
-            <a:endParaRPr lang="en-US" sz="1200" dirty="0"/>
-          </a:p>
-        </p:txBody>
-      </p:sp>
-      <p:sp>
-        <p:nvSpPr>
-          <p:cNvPr id="5" name="Text 3"/>
-          <p:cNvSpPr/>
-          <p:nvPr/>
-        </p:nvSpPr>
-        <p:spPr>
-          <a:xfrm>
-            <a:off x="634901" y="1173063"/>
-            <a:ext cx="8102798" cy="281880"/>
-          </a:xfrm>
-          <a:prstGeom prst="rect">
-            <a:avLst/>
-          </a:prstGeom>
-          <a:noFill/>
-          <a:ln/>
-        </p:spPr>
-        <p:txBody>
-          <a:bodyPr wrap="square" lIns="0" tIns="0" rIns="0" bIns="0" rtlCol="0" anchor="t"/>
-          <a:lstStyle/>
-          <a:p>
-            <a:pPr algn="l" marL="342900" indent="-342900">
+              <a:t>Brief: "Today is </a:t>
+            </a:r>
+            <a:pPr algn="l" indent="0" marL="0">
               <a:lnSpc>
                 <a:spcPts val="1620"/>
               </a:lnSpc>
               <a:spcAft>
                 <a:spcPts val="300"/>
               </a:spcAft>
-              <a:buSzPct val="100000"/>
-              <a:buChar char="•"/>
+              <a:buNone/>
             </a:pPr>
             <a:r>
               <a:rPr lang="en-US" sz="1200" b="1" dirty="0">
@@ -3442,40 +5120,12 @@
                 <a:ea typeface="Arial" pitchFamily="34" charset="-122"/>
                 <a:cs typeface="Arial" pitchFamily="34" charset="-120"/>
               </a:rPr>
-              <a:t>Half 1 (15 min) — Refine.</a:t>
-            </a:r>
-            <a:endParaRPr lang="en-US" sz="1200" dirty="0"/>
-          </a:p>
-        </p:txBody>
-      </p:sp>
-      <p:sp>
-        <p:nvSpPr>
-          <p:cNvPr id="6" name="Text 4"/>
-          <p:cNvSpPr/>
-          <p:nvPr/>
-        </p:nvSpPr>
-        <p:spPr>
-          <a:xfrm>
-            <a:off x="406301" y="1543794"/>
-            <a:ext cx="8498026" cy="853083"/>
-          </a:xfrm>
-          <a:prstGeom prst="rect">
-            <a:avLst/>
-          </a:prstGeom>
-          <a:noFill/>
-          <a:ln/>
-        </p:spPr>
-        <p:txBody>
-          <a:bodyPr wrap="square" lIns="0" tIns="0" rIns="0" bIns="0" rtlCol="0" anchor="t"/>
-          <a:lstStyle/>
-          <a:p>
+              <a:t>refine + rehearse</a:t>
+            </a:r>
             <a:pPr algn="l" indent="0" marL="0">
               <a:lnSpc>
-                <a:spcPts val="1680"/>
-              </a:lnSpc>
-              <a:spcBef>
-                <a:spcPts val="300"/>
-              </a:spcBef>
+                <a:spcPts val="1620"/>
+              </a:lnSpc>
               <a:spcAft>
                 <a:spcPts val="300"/>
               </a:spcAft>
@@ -3490,53 +5140,7 @@
                 <a:ea typeface="Arial" pitchFamily="34" charset="-122"/>
                 <a:cs typeface="Arial" pitchFamily="34" charset="-120"/>
               </a:rPr>
-              <a:t>– Continue building / drafting. – Teacher does rapid rotation: 60 seconds per pair, focused question: </a:t>
-            </a:r>
-            <a:pPr algn="l" indent="0" marL="0">
-              <a:lnSpc>
-                <a:spcPts val="1680"/>
-              </a:lnSpc>
-              <a:spcBef>
-                <a:spcPts val="300"/>
-              </a:spcBef>
-              <a:spcAft>
-                <a:spcPts val="300"/>
-              </a:spcAft>
-              <a:buNone/>
-            </a:pPr>
-            <a:r>
-              <a:rPr lang="en-US" sz="1200" i="1" dirty="0">
-                <a:solidFill>
-                  <a:srgbClr val="1C2833"/>
-                </a:solidFill>
-                <a:latin typeface="Arial" pitchFamily="34" charset="0"/>
-                <a:ea typeface="Arial" pitchFamily="34" charset="-122"/>
-                <a:cs typeface="Arial" pitchFamily="34" charset="-120"/>
-              </a:rPr>
-              <a:t>"Show me your strongest 30 seconds."</a:t>
-            </a:r>
-            <a:pPr algn="l" indent="0" marL="0">
-              <a:lnSpc>
-                <a:spcPts val="1680"/>
-              </a:lnSpc>
-              <a:spcBef>
-                <a:spcPts val="300"/>
-              </a:spcBef>
-              <a:spcAft>
-                <a:spcPts val="300"/>
-              </a:spcAft>
-              <a:buNone/>
-            </a:pPr>
-            <a:r>
-              <a:rPr lang="en-US" sz="1200" dirty="0">
-                <a:solidFill>
-                  <a:srgbClr val="1C2833"/>
-                </a:solidFill>
-                <a:latin typeface="Arial" pitchFamily="34" charset="0"/>
-                <a:ea typeface="Arial" pitchFamily="34" charset="-122"/>
-                <a:cs typeface="Arial" pitchFamily="34" charset="-120"/>
-              </a:rPr>
-              <a:t> – Look for projects that: – Are missing the citation — flag immediately. – Are missing the modern-science parallel — required for accuracy mark. – Are missing the local imbalance — required for the "originality / connection" mark. – Pairs that look ready early start to rehearse.</a:t>
+              <a:t>. By end of class, you'll have presented to one other pair and gotten feedback."</a:t>
             </a:r>
             <a:endParaRPr lang="en-US" sz="1200" dirty="0"/>
           </a:p>
@@ -3544,101 +5148,7 @@
       </p:sp>
       <p:sp>
         <p:nvSpPr>
-          <p:cNvPr id="7" name="Text 5"/>
-          <p:cNvSpPr/>
-          <p:nvPr/>
-        </p:nvSpPr>
-        <p:spPr>
-          <a:xfrm>
-            <a:off x="634901" y="2485727"/>
-            <a:ext cx="8102798" cy="281880"/>
-          </a:xfrm>
-          <a:prstGeom prst="rect">
-            <a:avLst/>
-          </a:prstGeom>
-          <a:noFill/>
-          <a:ln/>
-        </p:spPr>
-        <p:txBody>
-          <a:bodyPr wrap="square" lIns="0" tIns="0" rIns="0" bIns="0" rtlCol="0" anchor="t"/>
-          <a:lstStyle/>
-          <a:p>
-            <a:pPr algn="l" marL="342900" indent="-342900">
-              <a:lnSpc>
-                <a:spcPts val="1620"/>
-              </a:lnSpc>
-              <a:spcAft>
-                <a:spcPts val="300"/>
-              </a:spcAft>
-              <a:buSzPct val="100000"/>
-              <a:buChar char="•"/>
-            </a:pPr>
-            <a:r>
-              <a:rPr lang="en-US" sz="1200" b="1" dirty="0">
-                <a:solidFill>
-                  <a:srgbClr val="1C2833"/>
-                </a:solidFill>
-                <a:latin typeface="Arial" pitchFamily="34" charset="0"/>
-                <a:ea typeface="Arial" pitchFamily="34" charset="-122"/>
-                <a:cs typeface="Arial" pitchFamily="34" charset="-120"/>
-              </a:rPr>
-              <a:t>Half 2 (15 min) — Rehearse with a buddy pair.</a:t>
-            </a:r>
-            <a:endParaRPr lang="en-US" sz="1200" dirty="0"/>
-          </a:p>
-        </p:txBody>
-      </p:sp>
-      <p:sp>
-        <p:nvSpPr>
-          <p:cNvPr id="8" name="Text 6"/>
-          <p:cNvSpPr/>
-          <p:nvPr/>
-        </p:nvSpPr>
-        <p:spPr>
-          <a:xfrm>
-            <a:off x="406301" y="2856458"/>
-            <a:ext cx="8498026" cy="639812"/>
-          </a:xfrm>
-          <a:prstGeom prst="rect">
-            <a:avLst/>
-          </a:prstGeom>
-          <a:noFill/>
-          <a:ln/>
-        </p:spPr>
-        <p:txBody>
-          <a:bodyPr wrap="square" lIns="0" tIns="0" rIns="0" bIns="0" rtlCol="0" anchor="t"/>
-          <a:lstStyle/>
-          <a:p>
-            <a:pPr algn="l" indent="0" marL="0">
-              <a:lnSpc>
-                <a:spcPts val="1680"/>
-              </a:lnSpc>
-              <a:spcBef>
-                <a:spcPts val="300"/>
-              </a:spcBef>
-              <a:spcAft>
-                <a:spcPts val="300"/>
-              </a:spcAft>
-              <a:buNone/>
-            </a:pPr>
-            <a:r>
-              <a:rPr lang="en-US" sz="1200" dirty="0">
-                <a:solidFill>
-                  <a:srgbClr val="1C2833"/>
-                </a:solidFill>
-                <a:latin typeface="Arial" pitchFamily="34" charset="0"/>
-                <a:ea typeface="Arial" pitchFamily="34" charset="-122"/>
-                <a:cs typeface="Arial" pitchFamily="34" charset="-120"/>
-              </a:rPr>
-              <a:t>– Match each pair to one other pair. (Vary partners — match a strong pair with one that's behind, etc.)   – Pair A presents to Pair B for 3 minutes (use the timer).   – Pair B gives feedback for 60 seconds — one strength, one fix.   – Swap. (Total: 8 min per rotation, ×2 = 16 min — runs slightly over, that's OK.)</a:t>
-            </a:r>
-            <a:endParaRPr lang="en-US" sz="1200" dirty="0"/>
-          </a:p>
-        </p:txBody>
-      </p:sp>
-      <p:sp>
-        <p:nvSpPr>
-          <p:cNvPr id="9" name="Text 7"/>
+          <p:cNvPr id="5" name="Text 3"/>
           <p:cNvSpPr/>
           <p:nvPr/>
         </p:nvSpPr>
@@ -3788,7 +5298,7 @@
                 <a:ea typeface="Georgia" pitchFamily="34" charset="-122"/>
                 <a:cs typeface="Georgia" pitchFamily="34" charset="-120"/>
               </a:rPr>
-              <a:t>Activity in parallel</a:t>
+              <a:t>Core (30 min)</a:t>
             </a:r>
             <a:endParaRPr lang="en-US" sz="1800" dirty="0"/>
           </a:p>
@@ -3803,7 +5313,7 @@
         <p:spPr>
           <a:xfrm>
             <a:off x="406301" y="870942"/>
-            <a:ext cx="8498026" cy="426541"/>
+            <a:ext cx="8498026" cy="213271"/>
           </a:xfrm>
           <a:prstGeom prst="rect">
             <a:avLst/>
@@ -3828,7 +5338,7 @@
               <a:buNone/>
             </a:pPr>
             <a:r>
-              <a:rPr lang="en-US" sz="1200" dirty="0">
+              <a:rPr lang="en-US" sz="1200" b="1" dirty="0">
                 <a:solidFill>
                   <a:srgbClr val="1C2833"/>
                 </a:solidFill>
@@ -3836,7 +5346,7 @@
                 <a:ea typeface="Arial" pitchFamily="34" charset="-122"/>
                 <a:cs typeface="Arial" pitchFamily="34" charset="-120"/>
               </a:rPr>
-              <a:t>– Teacher with the timer; intervene if a pair tries to rehearse for more than 3 min. – Listen for projects that are </a:t>
+              <a:t>Structure:</a:t>
             </a:r>
             <a:pPr algn="l" indent="0" marL="0">
               <a:lnSpc>
@@ -3851,7 +5361,7 @@
               <a:buNone/>
             </a:pPr>
             <a:r>
-              <a:rPr lang="en-US" sz="1200" i="1" dirty="0">
+              <a:rPr lang="en-US" sz="1200" dirty="0">
                 <a:solidFill>
                   <a:srgbClr val="1C2833"/>
                 </a:solidFill>
@@ -3859,76 +5369,7 @@
                 <a:ea typeface="Arial" pitchFamily="34" charset="-122"/>
                 <a:cs typeface="Arial" pitchFamily="34" charset="-120"/>
               </a:rPr>
-              <a:t>all summary, no specifics</a:t>
-            </a:r>
-            <a:pPr algn="l" indent="0" marL="0">
-              <a:lnSpc>
-                <a:spcPts val="1680"/>
-              </a:lnSpc>
-              <a:spcBef>
-                <a:spcPts val="300"/>
-              </a:spcBef>
-              <a:spcAft>
-                <a:spcPts val="300"/>
-              </a:spcAft>
-              <a:buNone/>
-            </a:pPr>
-            <a:r>
-              <a:rPr lang="en-US" sz="1200" dirty="0">
-                <a:solidFill>
-                  <a:srgbClr val="1C2833"/>
-                </a:solidFill>
-                <a:latin typeface="Arial" pitchFamily="34" charset="0"/>
-                <a:ea typeface="Arial" pitchFamily="34" charset="-122"/>
-                <a:cs typeface="Arial" pitchFamily="34" charset="-120"/>
-              </a:rPr>
-              <a:t>. Intervene: "Give me one concrete example or detail — what does the audience </a:t>
-            </a:r>
-            <a:pPr algn="l" indent="0" marL="0">
-              <a:lnSpc>
-                <a:spcPts val="1680"/>
-              </a:lnSpc>
-              <a:spcBef>
-                <a:spcPts val="300"/>
-              </a:spcBef>
-              <a:spcAft>
-                <a:spcPts val="300"/>
-              </a:spcAft>
-              <a:buNone/>
-            </a:pPr>
-            <a:r>
-              <a:rPr lang="en-US" sz="1200" i="1" dirty="0">
-                <a:solidFill>
-                  <a:srgbClr val="1C2833"/>
-                </a:solidFill>
-                <a:latin typeface="Arial" pitchFamily="34" charset="0"/>
-                <a:ea typeface="Arial" pitchFamily="34" charset="-122"/>
-                <a:cs typeface="Arial" pitchFamily="34" charset="-120"/>
-              </a:rPr>
-              <a:t>see</a:t>
-            </a:r>
-            <a:pPr algn="l" indent="0" marL="0">
-              <a:lnSpc>
-                <a:spcPts val="1680"/>
-              </a:lnSpc>
-              <a:spcBef>
-                <a:spcPts val="300"/>
-              </a:spcBef>
-              <a:spcAft>
-                <a:spcPts val="300"/>
-              </a:spcAft>
-              <a:buNone/>
-            </a:pPr>
-            <a:r>
-              <a:rPr lang="en-US" sz="1200" dirty="0">
-                <a:solidFill>
-                  <a:srgbClr val="1C2833"/>
-                </a:solidFill>
-                <a:latin typeface="Arial" pitchFamily="34" charset="0"/>
-                <a:ea typeface="Arial" pitchFamily="34" charset="-122"/>
-                <a:cs typeface="Arial" pitchFamily="34" charset="-120"/>
-              </a:rPr>
-              <a:t>?"</a:t>
+              <a:t> Two 15-minute halves.</a:t>
             </a:r>
             <a:endParaRPr lang="en-US" sz="1200" dirty="0"/>
           </a:p>
@@ -4086,7 +5527,7 @@
                 <a:ea typeface="Georgia" pitchFamily="34" charset="-122"/>
                 <a:cs typeface="Georgia" pitchFamily="34" charset="-120"/>
               </a:rPr>
-              <a:t>Wrap-up (5 min)</a:t>
+              <a:t>Core (30 min) (cont.)</a:t>
             </a:r>
             <a:endParaRPr lang="en-US" sz="1800" dirty="0"/>
           </a:p>
@@ -4100,8 +5541,8 @@
         </p:nvSpPr>
         <p:spPr>
           <a:xfrm>
-            <a:off x="406301" y="870942"/>
-            <a:ext cx="8498026" cy="426541"/>
+            <a:off x="634901" y="883593"/>
+            <a:ext cx="8102798" cy="1988344"/>
           </a:xfrm>
           <a:prstGeom prst="rect">
             <a:avLst/>
@@ -4113,20 +5554,18 @@
           <a:bodyPr wrap="square" lIns="0" tIns="0" rIns="0" bIns="0" rtlCol="0" anchor="t"/>
           <a:lstStyle/>
           <a:p>
-            <a:pPr algn="l" indent="0" marL="0">
-              <a:lnSpc>
-                <a:spcPts val="1680"/>
-              </a:lnSpc>
-              <a:spcBef>
-                <a:spcPts val="300"/>
-              </a:spcBef>
-              <a:spcAft>
-                <a:spcPts val="300"/>
-              </a:spcAft>
-              <a:buNone/>
-            </a:pPr>
-            <a:r>
-              <a:rPr lang="en-US" sz="1200" dirty="0">
+            <a:pPr algn="l" marL="342900" indent="-342900">
+              <a:lnSpc>
+                <a:spcPts val="1620"/>
+              </a:lnSpc>
+              <a:spcAft>
+                <a:spcPts val="300"/>
+              </a:spcAft>
+              <a:buSzPct val="100000"/>
+              <a:buChar char="•"/>
+            </a:pPr>
+            <a:r>
+              <a:rPr lang="en-US" sz="1200" b="1" dirty="0">
                 <a:solidFill>
                   <a:srgbClr val="1C2833"/>
                 </a:solidFill>
@@ -4134,22 +5573,23 @@
                 <a:ea typeface="Arial" pitchFamily="34" charset="-122"/>
                 <a:cs typeface="Arial" pitchFamily="34" charset="-120"/>
               </a:rPr>
-              <a:t>– One-sentence share: </a:t>
-            </a:r>
-            <a:pPr algn="l" indent="0" marL="0">
-              <a:lnSpc>
-                <a:spcPts val="1680"/>
-              </a:lnSpc>
-              <a:spcBef>
-                <a:spcPts val="300"/>
-              </a:spcBef>
-              <a:spcAft>
-                <a:spcPts val="300"/>
-              </a:spcAft>
-              <a:buNone/>
-            </a:pPr>
-            <a:r>
-              <a:rPr lang="en-US" sz="1200" i="1" dirty="0">
+              <a:t>Half 1 (15 min) — Refine.</a:t>
+            </a:r>
+            <a:endParaRPr lang="en-US" sz="1200" dirty="0"/>
+          </a:p>
+          <a:p>
+            <a:pPr algn="l" marL="342900" indent="-342900">
+              <a:lnSpc>
+                <a:spcPts val="1620"/>
+              </a:lnSpc>
+              <a:spcAft>
+                <a:spcPts val="300"/>
+              </a:spcAft>
+              <a:buSzPct val="100000"/>
+              <a:buChar char="•"/>
+            </a:pPr>
+            <a:r>
+              <a:rPr lang="en-US" sz="1200" dirty="0">
                 <a:solidFill>
                   <a:srgbClr val="1C2833"/>
                 </a:solidFill>
@@ -4157,19 +5597,20 @@
                 <a:ea typeface="Arial" pitchFamily="34" charset="-122"/>
                 <a:cs typeface="Arial" pitchFamily="34" charset="-120"/>
               </a:rPr>
-              <a:t>"What's the one thing I'm changing before tomorrow?"</a:t>
-            </a:r>
-            <a:pPr algn="l" indent="0" marL="0">
-              <a:lnSpc>
-                <a:spcPts val="1680"/>
-              </a:lnSpc>
-              <a:spcBef>
-                <a:spcPts val="300"/>
-              </a:spcBef>
-              <a:spcAft>
-                <a:spcPts val="300"/>
-              </a:spcAft>
-              <a:buNone/>
+              <a:t>Continue building / drafting.</a:t>
+            </a:r>
+            <a:endParaRPr lang="en-US" sz="1200" dirty="0"/>
+          </a:p>
+          <a:p>
+            <a:pPr algn="l" marL="342900" indent="-342900">
+              <a:lnSpc>
+                <a:spcPts val="1620"/>
+              </a:lnSpc>
+              <a:spcAft>
+                <a:spcPts val="300"/>
+              </a:spcAft>
+              <a:buSzPct val="100000"/>
+              <a:buChar char="•"/>
             </a:pPr>
             <a:r>
               <a:rPr lang="en-US" sz="1200" dirty="0">
@@ -4180,7 +5621,147 @@
                 <a:ea typeface="Arial" pitchFamily="34" charset="-122"/>
                 <a:cs typeface="Arial" pitchFamily="34" charset="-120"/>
               </a:rPr>
-              <a:t> — every pair contributes. – Tomorrow: full presentations + summative quiz.</a:t>
+              <a:t>Teacher does rapid rotation: 60 seconds per pair, focused question: </a:t>
+            </a:r>
+            <a:pPr algn="l" indent="0" marL="0">
+              <a:lnSpc>
+                <a:spcPts val="1620"/>
+              </a:lnSpc>
+              <a:spcAft>
+                <a:spcPts val="300"/>
+              </a:spcAft>
+              <a:buNone/>
+            </a:pPr>
+            <a:r>
+              <a:rPr lang="en-US" sz="1200" i="1" dirty="0">
+                <a:solidFill>
+                  <a:srgbClr val="1C2833"/>
+                </a:solidFill>
+                <a:latin typeface="Arial" pitchFamily="34" charset="0"/>
+                <a:ea typeface="Arial" pitchFamily="34" charset="-122"/>
+                <a:cs typeface="Arial" pitchFamily="34" charset="-120"/>
+              </a:rPr>
+              <a:t>"Show me your strongest 30 seconds."</a:t>
+            </a:r>
+            <a:endParaRPr lang="en-US" sz="1200" dirty="0"/>
+          </a:p>
+          <a:p>
+            <a:pPr algn="l" marL="342900" indent="-342900">
+              <a:lnSpc>
+                <a:spcPts val="1620"/>
+              </a:lnSpc>
+              <a:spcAft>
+                <a:spcPts val="300"/>
+              </a:spcAft>
+              <a:buSzPct val="100000"/>
+              <a:buChar char="•"/>
+            </a:pPr>
+            <a:r>
+              <a:rPr lang="en-US" sz="1200" dirty="0">
+                <a:solidFill>
+                  <a:srgbClr val="1C2833"/>
+                </a:solidFill>
+                <a:latin typeface="Arial" pitchFamily="34" charset="0"/>
+                <a:ea typeface="Arial" pitchFamily="34" charset="-122"/>
+                <a:cs typeface="Arial" pitchFamily="34" charset="-120"/>
+              </a:rPr>
+              <a:t>Look for projects that:</a:t>
+            </a:r>
+            <a:endParaRPr lang="en-US" sz="1200" dirty="0"/>
+          </a:p>
+          <a:p>
+            <a:pPr algn="l" marL="342900" indent="-342900">
+              <a:lnSpc>
+                <a:spcPts val="1620"/>
+              </a:lnSpc>
+              <a:spcAft>
+                <a:spcPts val="300"/>
+              </a:spcAft>
+              <a:buSzPct val="100000"/>
+              <a:buChar char="•"/>
+            </a:pPr>
+            <a:r>
+              <a:rPr lang="en-US" sz="1200" dirty="0">
+                <a:solidFill>
+                  <a:srgbClr val="1C2833"/>
+                </a:solidFill>
+                <a:latin typeface="Arial" pitchFamily="34" charset="0"/>
+                <a:ea typeface="Arial" pitchFamily="34" charset="-122"/>
+                <a:cs typeface="Arial" pitchFamily="34" charset="-120"/>
+              </a:rPr>
+              <a:t>Are missing the citation — flag immediately.</a:t>
+            </a:r>
+            <a:endParaRPr lang="en-US" sz="1200" dirty="0"/>
+          </a:p>
+          <a:p>
+            <a:pPr algn="l" marL="342900" indent="-342900">
+              <a:lnSpc>
+                <a:spcPts val="1620"/>
+              </a:lnSpc>
+              <a:spcAft>
+                <a:spcPts val="300"/>
+              </a:spcAft>
+              <a:buSzPct val="100000"/>
+              <a:buChar char="•"/>
+            </a:pPr>
+            <a:r>
+              <a:rPr lang="en-US" sz="1200" dirty="0">
+                <a:solidFill>
+                  <a:srgbClr val="1C2833"/>
+                </a:solidFill>
+                <a:latin typeface="Arial" pitchFamily="34" charset="0"/>
+                <a:ea typeface="Arial" pitchFamily="34" charset="-122"/>
+                <a:cs typeface="Arial" pitchFamily="34" charset="-120"/>
+              </a:rPr>
+              <a:t>Are missing the modern-science parallel — required for accuracy mark.</a:t>
+            </a:r>
+            <a:endParaRPr lang="en-US" sz="1200" dirty="0"/>
+          </a:p>
+          <a:p>
+            <a:pPr algn="l" marL="342900" indent="-342900">
+              <a:lnSpc>
+                <a:spcPts val="1620"/>
+              </a:lnSpc>
+              <a:spcAft>
+                <a:spcPts val="300"/>
+              </a:spcAft>
+              <a:buSzPct val="100000"/>
+              <a:buChar char="•"/>
+            </a:pPr>
+            <a:r>
+              <a:rPr lang="en-US" sz="1200" dirty="0">
+                <a:solidFill>
+                  <a:srgbClr val="1C2833"/>
+                </a:solidFill>
+                <a:latin typeface="Arial" pitchFamily="34" charset="0"/>
+                <a:ea typeface="Arial" pitchFamily="34" charset="-122"/>
+                <a:cs typeface="Arial" pitchFamily="34" charset="-120"/>
+              </a:rPr>
+              <a:t>Are missing the local imbalance — required for the "originality / connection" mark.</a:t>
+            </a:r>
+            <a:endParaRPr lang="en-US" sz="1200" dirty="0"/>
+          </a:p>
+          <a:p>
+            <a:pPr algn="l" marL="342900" indent="-342900">
+              <a:lnSpc>
+                <a:spcPts val="1620"/>
+              </a:lnSpc>
+              <a:spcAft>
+                <a:spcPts val="300"/>
+              </a:spcAft>
+              <a:buSzPct val="100000"/>
+              <a:buChar char="•"/>
+            </a:pPr>
+            <a:r>
+              <a:rPr lang="en-US" sz="1200" dirty="0">
+                <a:solidFill>
+                  <a:srgbClr val="1C2833"/>
+                </a:solidFill>
+                <a:latin typeface="Arial" pitchFamily="34" charset="0"/>
+                <a:ea typeface="Arial" pitchFamily="34" charset="-122"/>
+                <a:cs typeface="Arial" pitchFamily="34" charset="-120"/>
+              </a:rPr>
+              <a:t>Pairs that look ready early start to rehearse.</a:t>
             </a:r>
             <a:endParaRPr lang="en-US" sz="1200" dirty="0"/>
           </a:p>
@@ -4338,7 +5919,7 @@
                 <a:ea typeface="Georgia" pitchFamily="34" charset="-122"/>
                 <a:cs typeface="Georgia" pitchFamily="34" charset="-120"/>
               </a:rPr>
-              <a:t>Homework</a:t>
+              <a:t>Core (30 min) (cont.)</a:t>
             </a:r>
             <a:endParaRPr lang="en-US" sz="1800" dirty="0"/>
           </a:p>
@@ -4352,8 +5933,8 @@
         </p:nvSpPr>
         <p:spPr>
           <a:xfrm>
-            <a:off x="406301" y="870942"/>
-            <a:ext cx="8498026" cy="213271"/>
+            <a:off x="634901" y="883593"/>
+            <a:ext cx="8102798" cy="1257002"/>
           </a:xfrm>
           <a:prstGeom prst="rect">
             <a:avLst/>
@@ -4365,20 +5946,18 @@
           <a:bodyPr wrap="square" lIns="0" tIns="0" rIns="0" bIns="0" rtlCol="0" anchor="t"/>
           <a:lstStyle/>
           <a:p>
-            <a:pPr algn="l" indent="0" marL="0">
-              <a:lnSpc>
-                <a:spcPts val="1680"/>
-              </a:lnSpc>
-              <a:spcBef>
-                <a:spcPts val="300"/>
-              </a:spcBef>
-              <a:spcAft>
-                <a:spcPts val="300"/>
-              </a:spcAft>
-              <a:buNone/>
-            </a:pPr>
-            <a:r>
-              <a:rPr lang="en-US" sz="1200" dirty="0">
+            <a:pPr algn="l" marL="342900" indent="-342900">
+              <a:lnSpc>
+                <a:spcPts val="1620"/>
+              </a:lnSpc>
+              <a:spcAft>
+                <a:spcPts val="300"/>
+              </a:spcAft>
+              <a:buSzPct val="100000"/>
+              <a:buChar char="•"/>
+            </a:pPr>
+            <a:r>
+              <a:rPr lang="en-US" sz="1200" b="1" dirty="0">
                 <a:solidFill>
                   <a:srgbClr val="1C2833"/>
                 </a:solidFill>
@@ -4386,7 +5965,103 @@
                 <a:ea typeface="Arial" pitchFamily="34" charset="-122"/>
                 <a:cs typeface="Arial" pitchFamily="34" charset="-120"/>
               </a:rPr>
-              <a:t>– Final touches at home tonight. Bring everything tomorrow.</a:t>
+              <a:t>Half 2 (15 min) — Rehearse with a buddy pair.</a:t>
+            </a:r>
+            <a:endParaRPr lang="en-US" sz="1200" dirty="0"/>
+          </a:p>
+          <a:p>
+            <a:pPr algn="l" marL="342900" indent="-342900">
+              <a:lnSpc>
+                <a:spcPts val="1620"/>
+              </a:lnSpc>
+              <a:spcAft>
+                <a:spcPts val="300"/>
+              </a:spcAft>
+              <a:buSzPct val="100000"/>
+              <a:buChar char="•"/>
+            </a:pPr>
+            <a:r>
+              <a:rPr lang="en-US" sz="1200" dirty="0">
+                <a:solidFill>
+                  <a:srgbClr val="1C2833"/>
+                </a:solidFill>
+                <a:latin typeface="Arial" pitchFamily="34" charset="0"/>
+                <a:ea typeface="Arial" pitchFamily="34" charset="-122"/>
+                <a:cs typeface="Arial" pitchFamily="34" charset="-120"/>
+              </a:rPr>
+              <a:t>Match each pair to one other pair. (Vary partners — match a strong pair with one that's behind, etc.)</a:t>
+            </a:r>
+            <a:endParaRPr lang="en-US" sz="1200" dirty="0"/>
+          </a:p>
+          <a:p>
+            <a:pPr algn="l" marL="342900" indent="-342900">
+              <a:lnSpc>
+                <a:spcPts val="1620"/>
+              </a:lnSpc>
+              <a:spcAft>
+                <a:spcPts val="300"/>
+              </a:spcAft>
+              <a:buSzPct val="100000"/>
+              <a:buChar char="•"/>
+            </a:pPr>
+            <a:r>
+              <a:rPr lang="en-US" sz="1200" dirty="0">
+                <a:solidFill>
+                  <a:srgbClr val="1C2833"/>
+                </a:solidFill>
+                <a:latin typeface="Arial" pitchFamily="34" charset="0"/>
+                <a:ea typeface="Arial" pitchFamily="34" charset="-122"/>
+                <a:cs typeface="Arial" pitchFamily="34" charset="-120"/>
+              </a:rPr>
+              <a:t>Pair A presents to Pair B for 3 minutes (use the timer).</a:t>
+            </a:r>
+            <a:endParaRPr lang="en-US" sz="1200" dirty="0"/>
+          </a:p>
+          <a:p>
+            <a:pPr algn="l" marL="342900" indent="-342900">
+              <a:lnSpc>
+                <a:spcPts val="1620"/>
+              </a:lnSpc>
+              <a:spcAft>
+                <a:spcPts val="300"/>
+              </a:spcAft>
+              <a:buSzPct val="100000"/>
+              <a:buChar char="•"/>
+            </a:pPr>
+            <a:r>
+              <a:rPr lang="en-US" sz="1200" dirty="0">
+                <a:solidFill>
+                  <a:srgbClr val="1C2833"/>
+                </a:solidFill>
+                <a:latin typeface="Arial" pitchFamily="34" charset="0"/>
+                <a:ea typeface="Arial" pitchFamily="34" charset="-122"/>
+                <a:cs typeface="Arial" pitchFamily="34" charset="-120"/>
+              </a:rPr>
+              <a:t>Pair B gives feedback for 60 seconds — one strength, one fix.</a:t>
+            </a:r>
+            <a:endParaRPr lang="en-US" sz="1200" dirty="0"/>
+          </a:p>
+          <a:p>
+            <a:pPr algn="l" marL="342900" indent="-342900">
+              <a:lnSpc>
+                <a:spcPts val="1620"/>
+              </a:lnSpc>
+              <a:spcAft>
+                <a:spcPts val="300"/>
+              </a:spcAft>
+              <a:buSzPct val="100000"/>
+              <a:buChar char="•"/>
+            </a:pPr>
+            <a:r>
+              <a:rPr lang="en-US" sz="1200" dirty="0">
+                <a:solidFill>
+                  <a:srgbClr val="1C2833"/>
+                </a:solidFill>
+                <a:latin typeface="Arial" pitchFamily="34" charset="0"/>
+                <a:ea typeface="Arial" pitchFamily="34" charset="-122"/>
+                <a:cs typeface="Arial" pitchFamily="34" charset="-120"/>
+              </a:rPr>
+              <a:t>Swap. (Total: 8 min per rotation, ×2 = 16 min — runs slightly over, that's OK.)</a:t>
             </a:r>
             <a:endParaRPr lang="en-US" sz="1200" dirty="0"/>
           </a:p>
@@ -4544,7 +6219,7 @@
                 <a:ea typeface="Georgia" pitchFamily="34" charset="-122"/>
                 <a:cs typeface="Georgia" pitchFamily="34" charset="-120"/>
               </a:rPr>
-              <a:t>Differentiation</a:t>
+              <a:t>Activity in parallel</a:t>
             </a:r>
             <a:endParaRPr lang="en-US" sz="1800" dirty="0"/>
           </a:p>
@@ -4559,7 +6234,7 @@
         <p:spPr>
           <a:xfrm>
             <a:off x="634901" y="883593"/>
-            <a:ext cx="8102798" cy="525661"/>
+            <a:ext cx="8102798" cy="731341"/>
           </a:xfrm>
           <a:prstGeom prst="rect">
             <a:avLst/>
@@ -4582,7 +6257,7 @@
               <a:buChar char="•"/>
             </a:pPr>
             <a:r>
-              <a:rPr lang="en-US" sz="1200" b="1" dirty="0">
+              <a:rPr lang="en-US" sz="1200" dirty="0">
                 <a:solidFill>
                   <a:srgbClr val="1C2833"/>
                 </a:solidFill>
@@ -4590,16 +6265,20 @@
                 <a:ea typeface="Arial" pitchFamily="34" charset="-122"/>
                 <a:cs typeface="Arial" pitchFamily="34" charset="-120"/>
               </a:rPr>
-              <a:t>One tier up:</a:t>
-            </a:r>
-            <a:pPr algn="l" indent="0" marL="0">
+              <a:t>Teacher with the timer; intervene if a pair tries to rehearse for more than 3 min.</a:t>
+            </a:r>
+            <a:endParaRPr lang="en-US" sz="1200" dirty="0"/>
+          </a:p>
+          <a:p>
+            <a:pPr algn="l" marL="342900" indent="-342900">
               <a:lnSpc>
                 <a:spcPts val="1620"/>
               </a:lnSpc>
               <a:spcAft>
                 <a:spcPts val="300"/>
               </a:spcAft>
-              <a:buNone/>
+              <a:buSzPct val="100000"/>
+              <a:buChar char="•"/>
             </a:pPr>
             <a:r>
               <a:rPr lang="en-US" sz="1200" dirty="0">
@@ -4610,23 +6289,19 @@
                 <a:ea typeface="Arial" pitchFamily="34" charset="-122"/>
                 <a:cs typeface="Arial" pitchFamily="34" charset="-120"/>
               </a:rPr>
-              <a:t> Add a Q&amp;A-ready note: anticipate one tricky question from the audience and prepare a 30-second answer.</a:t>
-            </a:r>
-            <a:endParaRPr lang="en-US" sz="1200" dirty="0"/>
-          </a:p>
-          <a:p>
-            <a:pPr algn="l" marL="342900" indent="-342900">
+              <a:t>Listen for projects that are </a:t>
+            </a:r>
+            <a:pPr algn="l" indent="0" marL="0">
               <a:lnSpc>
                 <a:spcPts val="1620"/>
               </a:lnSpc>
               <a:spcAft>
                 <a:spcPts val="300"/>
               </a:spcAft>
-              <a:buSzPct val="100000"/>
-              <a:buChar char="•"/>
-            </a:pPr>
-            <a:r>
-              <a:rPr lang="en-US" sz="1200" b="1" dirty="0">
+              <a:buNone/>
+            </a:pPr>
+            <a:r>
+              <a:rPr lang="en-US" sz="1200" i="1" dirty="0">
                 <a:solidFill>
                   <a:srgbClr val="1C2833"/>
                 </a:solidFill>
@@ -4634,7 +6309,7 @@
                 <a:ea typeface="Arial" pitchFamily="34" charset="-122"/>
                 <a:cs typeface="Arial" pitchFamily="34" charset="-120"/>
               </a:rPr>
-              <a:t>One tier down:</a:t>
+              <a:t>all summary, no specifics</a:t>
             </a:r>
             <a:pPr algn="l" indent="0" marL="0">
               <a:lnSpc>
@@ -4654,7 +6329,47 @@
                 <a:ea typeface="Arial" pitchFamily="34" charset="-122"/>
                 <a:cs typeface="Arial" pitchFamily="34" charset="-120"/>
               </a:rPr>
-              <a:t> Allow reading from a written script for the presentation. The goal is communication, not memorisation.</a:t>
+              <a:t>. Intervene: "Give me one concrete example or detail — what does the audience </a:t>
+            </a:r>
+            <a:pPr algn="l" indent="0" marL="0">
+              <a:lnSpc>
+                <a:spcPts val="1620"/>
+              </a:lnSpc>
+              <a:spcAft>
+                <a:spcPts val="300"/>
+              </a:spcAft>
+              <a:buNone/>
+            </a:pPr>
+            <a:r>
+              <a:rPr lang="en-US" sz="1200" i="1" dirty="0">
+                <a:solidFill>
+                  <a:srgbClr val="1C2833"/>
+                </a:solidFill>
+                <a:latin typeface="Arial" pitchFamily="34" charset="0"/>
+                <a:ea typeface="Arial" pitchFamily="34" charset="-122"/>
+                <a:cs typeface="Arial" pitchFamily="34" charset="-120"/>
+              </a:rPr>
+              <a:t>see</a:t>
+            </a:r>
+            <a:pPr algn="l" indent="0" marL="0">
+              <a:lnSpc>
+                <a:spcPts val="1620"/>
+              </a:lnSpc>
+              <a:spcAft>
+                <a:spcPts val="300"/>
+              </a:spcAft>
+              <a:buNone/>
+            </a:pPr>
+            <a:r>
+              <a:rPr lang="en-US" sz="1200" dirty="0">
+                <a:solidFill>
+                  <a:srgbClr val="1C2833"/>
+                </a:solidFill>
+                <a:latin typeface="Arial" pitchFamily="34" charset="0"/>
+                <a:ea typeface="Arial" pitchFamily="34" charset="-122"/>
+                <a:cs typeface="Arial" pitchFamily="34" charset="-120"/>
+              </a:rPr>
+              <a:t>?"</a:t>
             </a:r>
             <a:endParaRPr lang="en-US" sz="1200" dirty="0"/>
           </a:p>
